--- a/outputs/Vanguard_Presentación.pptx
+++ b/outputs/Vanguard_Presentación.pptx
@@ -6,29 +6,37 @@
     <p:sldMasterId id="2147483651" r:id="rId2"/>
   </p:sldMasterIdLst>
   <p:notesMasterIdLst>
-    <p:notesMasterId r:id="rId10"/>
+    <p:notesMasterId r:id="rId11"/>
   </p:notesMasterIdLst>
   <p:sldIdLst>
     <p:sldId id="256" r:id="rId3"/>
     <p:sldId id="257" r:id="rId4"/>
     <p:sldId id="259" r:id="rId5"/>
-    <p:sldId id="272" r:id="rId6"/>
-    <p:sldId id="277" r:id="rId7"/>
-    <p:sldId id="278" r:id="rId8"/>
-    <p:sldId id="261" r:id="rId9"/>
+    <p:sldId id="268" r:id="rId6"/>
+    <p:sldId id="272" r:id="rId7"/>
+    <p:sldId id="277" r:id="rId8"/>
+    <p:sldId id="278" r:id="rId9"/>
+    <p:sldId id="261" r:id="rId10"/>
   </p:sldIdLst>
   <p:sldSz cx="12192000" cy="6858000"/>
   <p:notesSz cx="6858000" cy="12192000"/>
   <p:embeddedFontLst>
     <p:embeddedFont>
-      <p:font typeface="DM Sans" pitchFamily="2" charset="0"/>
-      <p:regular r:id="rId11"/>
-      <p:bold r:id="rId12"/>
+      <p:font typeface="Calibri" panose="020F0502020204030204" pitchFamily="34" charset="0"/>
+      <p:regular r:id="rId12"/>
+      <p:bold r:id="rId13"/>
+      <p:italic r:id="rId14"/>
+      <p:boldItalic r:id="rId15"/>
+    </p:embeddedFont>
+    <p:embeddedFont>
+      <p:font typeface="DM Sans" panose="020B0604020202020204" charset="0"/>
+      <p:regular r:id="rId16"/>
+      <p:bold r:id="rId17"/>
     </p:embeddedFont>
     <p:embeddedFont>
       <p:font typeface="Space Grotesk" panose="020B0604020202020204" charset="0"/>
-      <p:regular r:id="rId13"/>
-      <p:bold r:id="rId14"/>
+      <p:regular r:id="rId18"/>
+      <p:bold r:id="rId19"/>
     </p:embeddedFont>
   </p:embeddedFontLst>
   <p:defaultTextStyle>
@@ -552,7 +560,10 @@
           <a:bodyPr/>
           <a:lstStyle/>
           <a:p>
-            <a:endParaRPr lang="en-US" dirty="0"/>
+            <a:r>
+              <a:rPr lang="en-US" dirty="0"/>
+              <a:t>(0:30) Para no quedarnos en «parece que», hicimos seis pruebas de hipótesis, todas con un nivel de significación del 5 %. La más importante es H1: el diseño nuevo mejora la finalización, con un p-valor prácticamente cero. La H2 es la del umbral de rentabilidad y la vemos en la siguiente diapositiva. Además comprobamos que los errores sí aumentan, que el paso al que llega la gente depende del diseño, y que el género está repartido igual. Una cosa que aprendimos: con muestras tan grandes casi todo es significativo. La edad media sale «diferente», pero son 0,34 años, en la práctica no importa.</a:t>
+            </a:r>
           </a:p>
         </p:txBody>
       </p:sp>
@@ -636,10 +647,7 @@
           <a:bodyPr/>
           <a:lstStyle/>
           <a:p>
-            <a:r>
-              <a:rPr lang="en-US" dirty="0"/>
-              <a:t>(8:00–8:45) [Vuelta de Tableau a las diapositivas.] Antes de cerrar, queremos ser honestos con lo que nuestros datos no pueden decir. Primero, el reparto entre grupos no fue 50/50, y no sabemos si fue intencionado. Segundo, no tenemos el dispositivo ni el navegador, así que no sabemos si el problema está en móvil o en ordenador. Tercero, sin el coste del rediseño ni el valor de cada proceso completado, no podemos traducir el 5 % a dinero. Y cuarto, los datos nos dicen dónde vuelven atrás los clientes, pero no por qué. Los resultados son prometedores, pero estas dudas condicionan la decisión.</a:t>
-            </a:r>
+            <a:endParaRPr lang="en-US" dirty="0"/>
           </a:p>
         </p:txBody>
       </p:sp>
@@ -725,7 +733,7 @@
           <a:p>
             <a:r>
               <a:rPr lang="en-US" dirty="0"/>
-              <a:t>(8:45–9:30) ¿Qué haríamos ahora? Tres pasos en orden. Primero, investigar: ver grabaciones de sesiones y hacer pruebas de usabilidad en el inicio y el paso 1, que es donde la gente vuelve atrás. Segundo, optimizar esas primeras pantallas. Y tercero, validar: repetir el experimento con un reparto 50/50, durante más semanas y midiendo también el impacto económico. Así pasamos de los datos a un plan de mejora que se puede comprobar.</a:t>
+              <a:t>(8:00–8:45) [Vuelta de Tableau a las diapositivas.] Antes de cerrar, queremos ser honestos con lo que nuestros datos no pueden decir. Primero, el reparto entre grupos no fue 50/50, y no sabemos si fue intencionado. Segundo, no tenemos el dispositivo ni el navegador, así que no sabemos si el problema está en móvil o en ordenador. Tercero, sin el coste del rediseño ni el valor de cada proceso completado, no podemos traducir el 5 % a dinero. Y cuarto, los datos nos dicen dónde vuelven atrás los clientes, pero no por qué. Los resultados son prometedores, pero estas dudas condicionan la decisión.</a:t>
             </a:r>
           </a:p>
         </p:txBody>
@@ -745,71 +753,11 @@
           <a:bodyPr/>
           <a:lstStyle/>
           <a:p>
-            <a:pPr marL="0" marR="0" lvl="0" indent="0" algn="l" defTabSz="914400" rtl="0" eaLnBrk="1" fontAlgn="auto" latinLnBrk="0" hangingPunct="1">
-              <a:lnSpc>
-                <a:spcPct val="100000"/>
-              </a:lnSpc>
-              <a:spcBef>
-                <a:spcPts val="0"/>
-              </a:spcBef>
-              <a:spcAft>
-                <a:spcPts val="0"/>
-              </a:spcAft>
-              <a:buClrTx/>
-              <a:buSzTx/>
-              <a:buFontTx/>
-              <a:buNone/>
-              <a:tabLst/>
-              <a:defRPr/>
-            </a:pPr>
             <a:fld id="{F7021451-1387-4CA6-816F-3879F97B5CBC}" type="slidenum">
-              <a:rPr kumimoji="0" lang="en-US" sz="1800" b="0" i="0" u="none" strike="noStrike" kern="1200" cap="none" spc="0" normalizeH="0" baseline="0" noProof="0">
-                <a:ln>
-                  <a:noFill/>
-                </a:ln>
-                <a:solidFill>
-                  <a:prstClr val="black"/>
-                </a:solidFill>
-                <a:effectLst/>
-                <a:uLnTx/>
-                <a:uFillTx/>
-                <a:latin typeface="Calibri" panose="020F0502020204030204"/>
-                <a:ea typeface="+mn-ea"/>
-                <a:cs typeface="+mn-cs"/>
-              </a:rPr>
-              <a:pPr marL="0" marR="0" lvl="0" indent="0" algn="l" defTabSz="914400" rtl="0" eaLnBrk="1" fontAlgn="auto" latinLnBrk="0" hangingPunct="1">
-                <a:lnSpc>
-                  <a:spcPct val="100000"/>
-                </a:lnSpc>
-                <a:spcBef>
-                  <a:spcPts val="0"/>
-                </a:spcBef>
-                <a:spcAft>
-                  <a:spcPts val="0"/>
-                </a:spcAft>
-                <a:buClrTx/>
-                <a:buSzTx/>
-                <a:buFontTx/>
-                <a:buNone/>
-                <a:tabLst/>
-                <a:defRPr/>
-              </a:pPr>
+              <a:rPr lang="en-US"/>
               <a:t>6</a:t>
             </a:fld>
-            <a:endParaRPr kumimoji="0" lang="en-US" sz="1800" b="0" i="0" u="none" strike="noStrike" kern="1200" cap="none" spc="0" normalizeH="0" baseline="0" noProof="0">
-              <a:ln>
-                <a:noFill/>
-              </a:ln>
-              <a:solidFill>
-                <a:prstClr val="black"/>
-              </a:solidFill>
-              <a:effectLst/>
-              <a:uLnTx/>
-              <a:uFillTx/>
-              <a:latin typeface="Calibri" panose="020F0502020204030204"/>
-              <a:ea typeface="+mn-ea"/>
-              <a:cs typeface="+mn-cs"/>
-            </a:endParaRPr>
+            <a:endParaRPr lang="en-US"/>
           </a:p>
         </p:txBody>
       </p:sp>
@@ -872,7 +820,7 @@
           <a:p>
             <a:r>
               <a:rPr lang="en-US" dirty="0"/>
-              <a:t>(9:30–10:00) Para terminar, la idea con la que nos quedamos: mejorar no siempre significa estar listo para lanzar. El diseño nuevo consigue que más clientes terminen, y es significativo, pero no hemos podido demostrar que supere el 5 % que justifica el cambio. Nuestro objetivo no era demostrar que el diseño nuevo era mejor, sino descubrir si había evidencia suficiente para implantarlo. Y la respuesta es: tiene potencial, pero hay que mejorarlo y validarlo antes de lanzarlo a todos. Muchas gracias. ¿Alguna pregunta?</a:t>
+              <a:t>(8:45–9:30) ¿Qué haríamos ahora? Tres pasos en orden. Primero, investigar: ver grabaciones de sesiones y hacer pruebas de usabilidad en el inicio y el paso 1, que es donde la gente vuelve atrás. Segundo, optimizar esas primeras pantallas. Y tercero, validar: repetir el experimento con un reparto 50/50, durante más semanas y midiendo también el impacto económico. Así pasamos de los datos a un plan de mejora que se puede comprobar.</a:t>
             </a:r>
           </a:p>
         </p:txBody>
@@ -942,6 +890,153 @@
                 <a:defRPr/>
               </a:pPr>
               <a:t>7</a:t>
+            </a:fld>
+            <a:endParaRPr kumimoji="0" lang="en-US" sz="1800" b="0" i="0" u="none" strike="noStrike" kern="1200" cap="none" spc="0" normalizeH="0" baseline="0" noProof="0">
+              <a:ln>
+                <a:noFill/>
+              </a:ln>
+              <a:solidFill>
+                <a:prstClr val="black"/>
+              </a:solidFill>
+              <a:effectLst/>
+              <a:uLnTx/>
+              <a:uFillTx/>
+              <a:latin typeface="Calibri" panose="020F0502020204030204"/>
+              <a:ea typeface="+mn-ea"/>
+              <a:cs typeface="+mn-cs"/>
+            </a:endParaRPr>
+          </a:p>
+        </p:txBody>
+      </p:sp>
+    </p:spTree>
+    <p:extLst>
+      <p:ext uri="{BB962C8B-B14F-4D97-AF65-F5344CB8AC3E}">
+        <p14:creationId xmlns:p14="http://schemas.microsoft.com/office/powerpoint/2010/main" val="1024086991"/>
+      </p:ext>
+    </p:extLst>
+  </p:cSld>
+  <p:clrMapOvr>
+    <a:masterClrMapping/>
+  </p:clrMapOvr>
+</p:notes>
+</file>
+
+<file path=ppt/notesSlides/notesSlide8.xml><?xml version="1.0" encoding="utf-8"?>
+<p:notes xmlns:a="http://schemas.openxmlformats.org/drawingml/2006/main" xmlns:r="http://schemas.openxmlformats.org/officeDocument/2006/relationships" xmlns:p="http://schemas.openxmlformats.org/presentationml/2006/main">
+  <p:cSld>
+    <p:spTree>
+      <p:nvGrpSpPr>
+        <p:cNvPr id="1" name=""/>
+        <p:cNvGrpSpPr/>
+        <p:nvPr/>
+      </p:nvGrpSpPr>
+      <p:grpSpPr>
+        <a:xfrm>
+          <a:off x="0" y="0"/>
+          <a:ext cx="0" cy="0"/>
+          <a:chOff x="0" y="0"/>
+          <a:chExt cx="0" cy="0"/>
+        </a:xfrm>
+      </p:grpSpPr>
+      <p:sp>
+        <p:nvSpPr>
+          <p:cNvPr id="2" name="Slide Image Placeholder 1"/>
+          <p:cNvSpPr>
+            <a:spLocks noGrp="1" noRot="1" noChangeAspect="1"/>
+          </p:cNvSpPr>
+          <p:nvPr>
+            <p:ph type="sldImg"/>
+          </p:nvPr>
+        </p:nvSpPr>
+        <p:spPr/>
+      </p:sp>
+      <p:sp>
+        <p:nvSpPr>
+          <p:cNvPr id="3" name="Notes Placeholder 2"/>
+          <p:cNvSpPr>
+            <a:spLocks noGrp="1"/>
+          </p:cNvSpPr>
+          <p:nvPr>
+            <p:ph type="body" idx="1"/>
+          </p:nvPr>
+        </p:nvSpPr>
+        <p:spPr/>
+        <p:txBody>
+          <a:bodyPr/>
+          <a:lstStyle/>
+          <a:p>
+            <a:r>
+              <a:rPr lang="en-US" dirty="0"/>
+              <a:t>(9:30–10:00) Para terminar, la idea con la que nos quedamos: mejorar no siempre significa estar listo para lanzar. El diseño nuevo consigue que más clientes terminen, y es significativo, pero no hemos podido demostrar que supere el 5 % que justifica el cambio. Nuestro objetivo no era demostrar que el diseño nuevo era mejor, sino descubrir si había evidencia suficiente para implantarlo. Y la respuesta es: tiene potencial, pero hay que mejorarlo y validarlo antes de lanzarlo a todos. Muchas gracias. ¿Alguna pregunta?</a:t>
+            </a:r>
+          </a:p>
+        </p:txBody>
+      </p:sp>
+      <p:sp>
+        <p:nvSpPr>
+          <p:cNvPr id="4" name="Slide Number Placeholder 3"/>
+          <p:cNvSpPr>
+            <a:spLocks noGrp="1"/>
+          </p:cNvSpPr>
+          <p:nvPr>
+            <p:ph type="sldNum" sz="quarter" idx="10"/>
+          </p:nvPr>
+        </p:nvSpPr>
+        <p:spPr/>
+        <p:txBody>
+          <a:bodyPr/>
+          <a:lstStyle/>
+          <a:p>
+            <a:pPr marL="0" marR="0" lvl="0" indent="0" algn="l" defTabSz="914400" rtl="0" eaLnBrk="1" fontAlgn="auto" latinLnBrk="0" hangingPunct="1">
+              <a:lnSpc>
+                <a:spcPct val="100000"/>
+              </a:lnSpc>
+              <a:spcBef>
+                <a:spcPts val="0"/>
+              </a:spcBef>
+              <a:spcAft>
+                <a:spcPts val="0"/>
+              </a:spcAft>
+              <a:buClrTx/>
+              <a:buSzTx/>
+              <a:buFontTx/>
+              <a:buNone/>
+              <a:tabLst/>
+              <a:defRPr/>
+            </a:pPr>
+            <a:fld id="{F7021451-1387-4CA6-816F-3879F97B5CBC}" type="slidenum">
+              <a:rPr kumimoji="0" lang="en-US" sz="1800" b="0" i="0" u="none" strike="noStrike" kern="1200" cap="none" spc="0" normalizeH="0" baseline="0" noProof="0">
+                <a:ln>
+                  <a:noFill/>
+                </a:ln>
+                <a:solidFill>
+                  <a:prstClr val="black"/>
+                </a:solidFill>
+                <a:effectLst/>
+                <a:uLnTx/>
+                <a:uFillTx/>
+                <a:latin typeface="Calibri" panose="020F0502020204030204"/>
+                <a:ea typeface="+mn-ea"/>
+                <a:cs typeface="+mn-cs"/>
+              </a:rPr>
+              <a:pPr marL="0" marR="0" lvl="0" indent="0" algn="l" defTabSz="914400" rtl="0" eaLnBrk="1" fontAlgn="auto" latinLnBrk="0" hangingPunct="1">
+                <a:lnSpc>
+                  <a:spcPct val="100000"/>
+                </a:lnSpc>
+                <a:spcBef>
+                  <a:spcPts val="0"/>
+                </a:spcBef>
+                <a:spcAft>
+                  <a:spcPts val="0"/>
+                </a:spcAft>
+                <a:buClrTx/>
+                <a:buSzTx/>
+                <a:buFontTx/>
+                <a:buNone/>
+                <a:tabLst/>
+                <a:defRPr/>
+              </a:pPr>
+              <a:t>8</a:t>
             </a:fld>
             <a:endParaRPr kumimoji="0" lang="en-US" sz="1800" b="0" i="0" u="none" strike="noStrike" kern="1200" cap="none" spc="0" normalizeH="0" baseline="0" noProof="0">
               <a:ln>
@@ -4839,6 +4934,2800 @@
 
 <file path=ppt/slides/slide4.xml><?xml version="1.0" encoding="utf-8"?>
 <p:sld xmlns:a="http://schemas.openxmlformats.org/drawingml/2006/main" xmlns:r="http://schemas.openxmlformats.org/officeDocument/2006/relationships" xmlns:p="http://schemas.openxmlformats.org/presentationml/2006/main">
+  <p:cSld>
+    <p:spTree>
+      <p:nvGrpSpPr>
+        <p:cNvPr id="1" name=""/>
+        <p:cNvGrpSpPr/>
+        <p:nvPr/>
+      </p:nvGrpSpPr>
+      <p:grpSpPr>
+        <a:xfrm>
+          <a:off x="0" y="0"/>
+          <a:ext cx="0" cy="0"/>
+          <a:chOff x="0" y="0"/>
+          <a:chExt cx="0" cy="0"/>
+        </a:xfrm>
+      </p:grpSpPr>
+      <p:sp>
+        <p:nvSpPr>
+          <p:cNvPr id="2" name="Text 0"/>
+          <p:cNvSpPr/>
+          <p:nvPr/>
+        </p:nvSpPr>
+        <p:spPr>
+          <a:xfrm>
+            <a:off x="812800" y="812800"/>
+            <a:ext cx="10883392" cy="238720"/>
+          </a:xfrm>
+          <a:prstGeom prst="rect">
+            <a:avLst/>
+          </a:prstGeom>
+          <a:noFill/>
+          <a:ln/>
+        </p:spPr>
+        <p:txBody>
+          <a:bodyPr wrap="square" lIns="0" tIns="0" rIns="0" bIns="0" rtlCol="0" anchor="t">
+            <a:normAutofit/>
+          </a:bodyPr>
+          <a:lstStyle/>
+          <a:p>
+            <a:pPr marL="0" indent="0" algn="l">
+              <a:lnSpc>
+                <a:spcPts val="1680"/>
+              </a:lnSpc>
+              <a:buNone/>
+            </a:pPr>
+            <a:r>
+              <a:rPr lang="en-US" sz="1200" b="1" kern="0" spc="150" dirty="0">
+                <a:solidFill>
+                  <a:srgbClr val="C8102E"/>
+                </a:solidFill>
+                <a:latin typeface="DM Sans" pitchFamily="34" charset="0"/>
+                <a:ea typeface="DM Sans" pitchFamily="34" charset="-122"/>
+                <a:cs typeface="DM Sans" pitchFamily="34" charset="-120"/>
+              </a:rPr>
+              <a:t>PRUEBAS DE HIPÓTESIS · Α = 0,05</a:t>
+            </a:r>
+            <a:endParaRPr lang="en-US" sz="1200" dirty="0"/>
+          </a:p>
+        </p:txBody>
+      </p:sp>
+      <p:sp>
+        <p:nvSpPr>
+          <p:cNvPr id="3" name="Text 1"/>
+          <p:cNvSpPr>
+            <a:spLocks noGrp="1"/>
+          </p:cNvSpPr>
+          <p:nvPr>
+            <p:ph type="title"/>
+          </p:nvPr>
+        </p:nvSpPr>
+        <p:spPr>
+          <a:xfrm>
+            <a:off x="812800" y="1102320"/>
+            <a:ext cx="10883392" cy="472414"/>
+          </a:xfrm>
+          <a:prstGeom prst="rect">
+            <a:avLst/>
+          </a:prstGeom>
+          <a:noFill/>
+          <a:ln/>
+        </p:spPr>
+        <p:txBody>
+          <a:bodyPr wrap="square" lIns="0" tIns="0" rIns="0" bIns="0" rtlCol="0" anchor="t">
+            <a:normAutofit/>
+          </a:bodyPr>
+          <a:lstStyle/>
+          <a:p>
+            <a:pPr marL="0" indent="0" algn="l">
+              <a:lnSpc>
+                <a:spcPts val="3520"/>
+              </a:lnSpc>
+              <a:buNone/>
+            </a:pPr>
+            <a:r>
+              <a:rPr lang="en-US" sz="3200" b="1" i="0" dirty="0">
+                <a:solidFill>
+                  <a:srgbClr val="131B2E"/>
+                </a:solidFill>
+                <a:latin typeface="Space Grotesk" pitchFamily="34" charset="0"/>
+                <a:ea typeface="Space Grotesk" pitchFamily="34" charset="-122"/>
+                <a:cs typeface="Space Grotesk" pitchFamily="34" charset="-120"/>
+              </a:rPr>
+              <a:t>Seis contrastes para pasar de «parece» a «es»</a:t>
+            </a:r>
+            <a:endParaRPr lang="en-US" sz="3200" dirty="0"/>
+          </a:p>
+        </p:txBody>
+      </p:sp>
+      <p:sp>
+        <p:nvSpPr>
+          <p:cNvPr id="4" name="Shape 2"/>
+          <p:cNvSpPr/>
+          <p:nvPr/>
+        </p:nvSpPr>
+        <p:spPr>
+          <a:xfrm>
+            <a:off x="812800" y="1828738"/>
+            <a:ext cx="10566400" cy="2527829"/>
+          </a:xfrm>
+          <a:prstGeom prst="roundRect">
+            <a:avLst>
+              <a:gd name="adj" fmla="val 4019"/>
+            </a:avLst>
+          </a:prstGeom>
+          <a:solidFill>
+            <a:srgbClr val="F5F2EC"/>
+          </a:solidFill>
+          <a:ln/>
+        </p:spPr>
+      </p:sp>
+      <p:sp>
+        <p:nvSpPr>
+          <p:cNvPr id="5" name="Shape 3"/>
+          <p:cNvSpPr/>
+          <p:nvPr/>
+        </p:nvSpPr>
+        <p:spPr>
+          <a:xfrm>
+            <a:off x="812800" y="1828738"/>
+            <a:ext cx="10566400" cy="2527829"/>
+          </a:xfrm>
+          <a:custGeom>
+            <a:avLst/>
+            <a:gdLst/>
+            <a:ahLst/>
+            <a:cxnLst/>
+            <a:rect l="l" t="t" r="r" b="b"/>
+            <a:pathLst>
+              <a:path w="10566400" h="2527829">
+                <a:moveTo>
+                  <a:pt x="101600" y="2527829"/>
+                </a:moveTo>
+                <a:lnTo>
+                  <a:pt x="101600" y="2527829"/>
+                </a:lnTo>
+                <a:arcTo wR="101600" hR="101600" stAng="5400000" swAng="5400000"/>
+                <a:lnTo>
+                  <a:pt x="0" y="101600"/>
+                </a:lnTo>
+                <a:arcTo wR="101600" hR="101600" stAng="10800000" swAng="5400000"/>
+                <a:lnTo>
+                  <a:pt x="10464800" y="0"/>
+                </a:lnTo>
+                <a:arcTo wR="101600" hR="101600" stAng="16200000" swAng="5400000"/>
+                <a:lnTo>
+                  <a:pt x="10566400" y="101600"/>
+                </a:lnTo>
+                <a:arcTo wR="101600" hR="88900" stAng="0" swAng="-5400000"/>
+                <a:lnTo>
+                  <a:pt x="101600" y="12700"/>
+                </a:lnTo>
+                <a:arcTo wR="88900" hR="88900" stAng="16200000" swAng="-5400000"/>
+                <a:lnTo>
+                  <a:pt x="12700" y="2426229"/>
+                </a:lnTo>
+                <a:arcTo wR="88900" hR="101600" stAng="10800000" swAng="-5400000"/>
+                <a:close/>
+              </a:path>
+            </a:pathLst>
+          </a:custGeom>
+          <a:solidFill>
+            <a:srgbClr val="141413">
+              <a:alpha val="22000"/>
+            </a:srgbClr>
+          </a:solidFill>
+          <a:ln/>
+        </p:spPr>
+      </p:sp>
+      <p:graphicFrame>
+        <p:nvGraphicFramePr>
+          <p:cNvPr id="6" name="Table 0"/>
+          <p:cNvGraphicFramePr>
+            <a:graphicFrameLocks noGrp="1"/>
+          </p:cNvGraphicFramePr>
+          <p:nvPr>
+            <p:extLst>
+              <p:ext uri="{D42A27DB-BD31-4B8C-83A1-F6EECF244321}">
+                <p14:modId xmlns:p14="http://schemas.microsoft.com/office/powerpoint/2010/main" val="1917494153"/>
+              </p:ext>
+            </p:extLst>
+          </p:nvPr>
+        </p:nvGraphicFramePr>
+        <p:xfrm>
+          <a:off x="825500" y="1841438"/>
+          <a:ext cx="10553700" cy="2515128"/>
+        </p:xfrm>
+        <a:graphic>
+          <a:graphicData uri="http://schemas.openxmlformats.org/drawingml/2006/table">
+            <a:tbl>
+              <a:tblPr/>
+              <a:tblGrid>
+                <a:gridCol w="633222">
+                  <a:extLst>
+                    <a:ext uri="{9D8B030D-6E8A-4147-A177-3AD203B41FA5}">
+                      <a16:colId xmlns:a16="http://schemas.microsoft.com/office/drawing/2014/main" val="20000"/>
+                    </a:ext>
+                  </a:extLst>
+                </a:gridCol>
+                <a:gridCol w="3404223">
+                  <a:extLst>
+                    <a:ext uri="{9D8B030D-6E8A-4147-A177-3AD203B41FA5}">
+                      <a16:colId xmlns:a16="http://schemas.microsoft.com/office/drawing/2014/main" val="20001"/>
+                    </a:ext>
+                  </a:extLst>
+                </a:gridCol>
+                <a:gridCol w="1978164">
+                  <a:extLst>
+                    <a:ext uri="{9D8B030D-6E8A-4147-A177-3AD203B41FA5}">
+                      <a16:colId xmlns:a16="http://schemas.microsoft.com/office/drawing/2014/main" val="20002"/>
+                    </a:ext>
+                  </a:extLst>
+                </a:gridCol>
+                <a:gridCol w="2321814">
+                  <a:extLst>
+                    <a:ext uri="{9D8B030D-6E8A-4147-A177-3AD203B41FA5}">
+                      <a16:colId xmlns:a16="http://schemas.microsoft.com/office/drawing/2014/main" val="20003"/>
+                    </a:ext>
+                  </a:extLst>
+                </a:gridCol>
+                <a:gridCol w="2216277">
+                  <a:extLst>
+                    <a:ext uri="{9D8B030D-6E8A-4147-A177-3AD203B41FA5}">
+                      <a16:colId xmlns:a16="http://schemas.microsoft.com/office/drawing/2014/main" val="20004"/>
+                    </a:ext>
+                  </a:extLst>
+                </a:gridCol>
+              </a:tblGrid>
+              <a:tr h="359304">
+                <a:tc>
+                  <a:txBody>
+                    <a:bodyPr/>
+                    <a:lstStyle/>
+                    <a:p>
+                      <a:pPr marL="0" indent="0">
+                        <a:lnSpc>
+                          <a:spcPts val="1820"/>
+                        </a:lnSpc>
+                        <a:buNone/>
+                      </a:pPr>
+                      <a:endParaRPr lang="en-US" sz="1300" dirty="0">
+                        <a:latin typeface="DM Sans" charset="0"/>
+                        <a:ea typeface="DM Sans" charset="0"/>
+                        <a:cs typeface="DM Sans" charset="0"/>
+                      </a:endParaRPr>
+                    </a:p>
+                  </a:txBody>
+                  <a:tcPr marL="57785" marR="57785" marT="57785" marB="57785">
+                    <a:lnL w="0" cap="flat" cmpd="sng" algn="ctr">
+                      <a:noFill/>
+                    </a:lnL>
+                    <a:lnR w="12700" cap="flat" cmpd="sng" algn="ctr">
+                      <a:solidFill>
+                        <a:srgbClr val="131928"/>
+                      </a:solidFill>
+                      <a:prstDash val="solid"/>
+                      <a:round/>
+                      <a:headEnd type="none" w="med" len="med"/>
+                      <a:tailEnd type="none" w="med" len="med"/>
+                    </a:lnR>
+                    <a:lnT w="0" cap="flat" cmpd="sng" algn="ctr">
+                      <a:noFill/>
+                    </a:lnT>
+                    <a:lnB w="12700" cap="flat" cmpd="sng" algn="ctr">
+                      <a:solidFill>
+                        <a:srgbClr val="131928"/>
+                      </a:solidFill>
+                      <a:prstDash val="solid"/>
+                      <a:round/>
+                      <a:headEnd type="none" w="med" len="med"/>
+                      <a:tailEnd type="none" w="med" len="med"/>
+                    </a:lnB>
+                    <a:solidFill>
+                      <a:srgbClr val="131B2E"/>
+                    </a:solidFill>
+                  </a:tcPr>
+                </a:tc>
+                <a:tc>
+                  <a:txBody>
+                    <a:bodyPr/>
+                    <a:lstStyle/>
+                    <a:p>
+                      <a:pPr marL="0" indent="0">
+                        <a:lnSpc>
+                          <a:spcPts val="1820"/>
+                        </a:lnSpc>
+                        <a:buNone/>
+                      </a:pPr>
+                      <a:r>
+                        <a:rPr lang="en-US" sz="1300" b="1" dirty="0">
+                          <a:solidFill>
+                            <a:srgbClr val="F5F2EC"/>
+                          </a:solidFill>
+                          <a:latin typeface="DM Sans" pitchFamily="34" charset="0"/>
+                          <a:ea typeface="DM Sans" pitchFamily="34" charset="-122"/>
+                          <a:cs typeface="DM Sans" pitchFamily="34" charset="-120"/>
+                        </a:rPr>
+                        <a:t>Qué comprobamos</a:t>
+                      </a:r>
+                      <a:endParaRPr lang="en-US" sz="1300" dirty="0">
+                        <a:latin typeface="DM Sans" charset="0"/>
+                        <a:ea typeface="DM Sans" charset="0"/>
+                        <a:cs typeface="DM Sans" charset="0"/>
+                      </a:endParaRPr>
+                    </a:p>
+                  </a:txBody>
+                  <a:tcPr marL="57785" marR="57785" marT="57785" marB="57785">
+                    <a:lnL w="12700" cap="flat" cmpd="sng" algn="ctr">
+                      <a:solidFill>
+                        <a:srgbClr val="131928"/>
+                      </a:solidFill>
+                      <a:prstDash val="solid"/>
+                      <a:round/>
+                      <a:headEnd type="none" w="med" len="med"/>
+                      <a:tailEnd type="none" w="med" len="med"/>
+                    </a:lnL>
+                    <a:lnR w="12700" cap="flat" cmpd="sng" algn="ctr">
+                      <a:solidFill>
+                        <a:srgbClr val="131928"/>
+                      </a:solidFill>
+                      <a:prstDash val="solid"/>
+                      <a:round/>
+                      <a:headEnd type="none" w="med" len="med"/>
+                      <a:tailEnd type="none" w="med" len="med"/>
+                    </a:lnR>
+                    <a:lnT w="0" cap="flat" cmpd="sng" algn="ctr">
+                      <a:noFill/>
+                    </a:lnT>
+                    <a:lnB w="12700" cap="flat" cmpd="sng" algn="ctr">
+                      <a:solidFill>
+                        <a:srgbClr val="131928"/>
+                      </a:solidFill>
+                      <a:prstDash val="solid"/>
+                      <a:round/>
+                      <a:headEnd type="none" w="med" len="med"/>
+                      <a:tailEnd type="none" w="med" len="med"/>
+                    </a:lnB>
+                    <a:solidFill>
+                      <a:srgbClr val="131B2E"/>
+                    </a:solidFill>
+                  </a:tcPr>
+                </a:tc>
+                <a:tc>
+                  <a:txBody>
+                    <a:bodyPr/>
+                    <a:lstStyle/>
+                    <a:p>
+                      <a:pPr marL="0" indent="0">
+                        <a:lnSpc>
+                          <a:spcPts val="1820"/>
+                        </a:lnSpc>
+                        <a:buNone/>
+                      </a:pPr>
+                      <a:r>
+                        <a:rPr lang="en-US" sz="1300" b="1" dirty="0">
+                          <a:solidFill>
+                            <a:srgbClr val="F5F2EC"/>
+                          </a:solidFill>
+                          <a:latin typeface="DM Sans" pitchFamily="34" charset="0"/>
+                          <a:ea typeface="DM Sans" pitchFamily="34" charset="-122"/>
+                          <a:cs typeface="DM Sans" pitchFamily="34" charset="-120"/>
+                        </a:rPr>
+                        <a:t>Prueba</a:t>
+                      </a:r>
+                      <a:endParaRPr lang="en-US" sz="1300" dirty="0">
+                        <a:latin typeface="DM Sans" charset="0"/>
+                        <a:ea typeface="DM Sans" charset="0"/>
+                        <a:cs typeface="DM Sans" charset="0"/>
+                      </a:endParaRPr>
+                    </a:p>
+                  </a:txBody>
+                  <a:tcPr marL="57785" marR="57785" marT="57785" marB="57785">
+                    <a:lnL w="12700" cap="flat" cmpd="sng" algn="ctr">
+                      <a:solidFill>
+                        <a:srgbClr val="131928"/>
+                      </a:solidFill>
+                      <a:prstDash val="solid"/>
+                      <a:round/>
+                      <a:headEnd type="none" w="med" len="med"/>
+                      <a:tailEnd type="none" w="med" len="med"/>
+                    </a:lnL>
+                    <a:lnR w="12700" cap="flat" cmpd="sng" algn="ctr">
+                      <a:solidFill>
+                        <a:srgbClr val="131928"/>
+                      </a:solidFill>
+                      <a:prstDash val="solid"/>
+                      <a:round/>
+                      <a:headEnd type="none" w="med" len="med"/>
+                      <a:tailEnd type="none" w="med" len="med"/>
+                    </a:lnR>
+                    <a:lnT w="0" cap="flat" cmpd="sng" algn="ctr">
+                      <a:noFill/>
+                    </a:lnT>
+                    <a:lnB w="12700" cap="flat" cmpd="sng" algn="ctr">
+                      <a:solidFill>
+                        <a:srgbClr val="131928"/>
+                      </a:solidFill>
+                      <a:prstDash val="solid"/>
+                      <a:round/>
+                      <a:headEnd type="none" w="med" len="med"/>
+                      <a:tailEnd type="none" w="med" len="med"/>
+                    </a:lnB>
+                    <a:solidFill>
+                      <a:srgbClr val="131B2E"/>
+                    </a:solidFill>
+                  </a:tcPr>
+                </a:tc>
+                <a:tc>
+                  <a:txBody>
+                    <a:bodyPr/>
+                    <a:lstStyle/>
+                    <a:p>
+                      <a:pPr marL="0" indent="0">
+                        <a:lnSpc>
+                          <a:spcPts val="1820"/>
+                        </a:lnSpc>
+                        <a:buNone/>
+                      </a:pPr>
+                      <a:r>
+                        <a:rPr lang="en-US" sz="1300" b="1" dirty="0">
+                          <a:solidFill>
+                            <a:srgbClr val="F5F2EC"/>
+                          </a:solidFill>
+                          <a:latin typeface="DM Sans" pitchFamily="34" charset="0"/>
+                          <a:ea typeface="DM Sans" pitchFamily="34" charset="-122"/>
+                          <a:cs typeface="DM Sans" pitchFamily="34" charset="-120"/>
+                        </a:rPr>
+                        <a:t>Resultado</a:t>
+                      </a:r>
+                      <a:endParaRPr lang="en-US" sz="1300" dirty="0">
+                        <a:latin typeface="DM Sans" charset="0"/>
+                        <a:ea typeface="DM Sans" charset="0"/>
+                        <a:cs typeface="DM Sans" charset="0"/>
+                      </a:endParaRPr>
+                    </a:p>
+                  </a:txBody>
+                  <a:tcPr marL="57785" marR="57785" marT="57785" marB="57785">
+                    <a:lnL w="12700" cap="flat" cmpd="sng" algn="ctr">
+                      <a:solidFill>
+                        <a:srgbClr val="131928"/>
+                      </a:solidFill>
+                      <a:prstDash val="solid"/>
+                      <a:round/>
+                      <a:headEnd type="none" w="med" len="med"/>
+                      <a:tailEnd type="none" w="med" len="med"/>
+                    </a:lnL>
+                    <a:lnR w="12700" cap="flat" cmpd="sng" algn="ctr">
+                      <a:solidFill>
+                        <a:srgbClr val="131928"/>
+                      </a:solidFill>
+                      <a:prstDash val="solid"/>
+                      <a:round/>
+                      <a:headEnd type="none" w="med" len="med"/>
+                      <a:tailEnd type="none" w="med" len="med"/>
+                    </a:lnR>
+                    <a:lnT w="0" cap="flat" cmpd="sng" algn="ctr">
+                      <a:noFill/>
+                    </a:lnT>
+                    <a:lnB w="12700" cap="flat" cmpd="sng" algn="ctr">
+                      <a:solidFill>
+                        <a:srgbClr val="131928"/>
+                      </a:solidFill>
+                      <a:prstDash val="solid"/>
+                      <a:round/>
+                      <a:headEnd type="none" w="med" len="med"/>
+                      <a:tailEnd type="none" w="med" len="med"/>
+                    </a:lnB>
+                    <a:solidFill>
+                      <a:srgbClr val="131B2E"/>
+                    </a:solidFill>
+                  </a:tcPr>
+                </a:tc>
+                <a:tc>
+                  <a:txBody>
+                    <a:bodyPr/>
+                    <a:lstStyle/>
+                    <a:p>
+                      <a:pPr marL="0" indent="0">
+                        <a:lnSpc>
+                          <a:spcPts val="1820"/>
+                        </a:lnSpc>
+                        <a:buNone/>
+                      </a:pPr>
+                      <a:r>
+                        <a:rPr lang="en-US" sz="1300" b="1" dirty="0">
+                          <a:solidFill>
+                            <a:srgbClr val="F5F2EC"/>
+                          </a:solidFill>
+                          <a:latin typeface="DM Sans" pitchFamily="34" charset="0"/>
+                          <a:ea typeface="DM Sans" pitchFamily="34" charset="-122"/>
+                          <a:cs typeface="DM Sans" pitchFamily="34" charset="-120"/>
+                        </a:rPr>
+                        <a:t>Conclusión</a:t>
+                      </a:r>
+                      <a:endParaRPr lang="en-US" sz="1300" dirty="0">
+                        <a:latin typeface="DM Sans" charset="0"/>
+                        <a:ea typeface="DM Sans" charset="0"/>
+                        <a:cs typeface="DM Sans" charset="0"/>
+                      </a:endParaRPr>
+                    </a:p>
+                  </a:txBody>
+                  <a:tcPr marL="57785" marR="57785" marT="57785" marB="57785">
+                    <a:lnL w="12700" cap="flat" cmpd="sng" algn="ctr">
+                      <a:solidFill>
+                        <a:srgbClr val="131928"/>
+                      </a:solidFill>
+                      <a:prstDash val="solid"/>
+                      <a:round/>
+                      <a:headEnd type="none" w="med" len="med"/>
+                      <a:tailEnd type="none" w="med" len="med"/>
+                    </a:lnL>
+                    <a:lnR w="12700" cap="flat" cmpd="sng" algn="ctr">
+                      <a:solidFill>
+                        <a:srgbClr val="131928"/>
+                      </a:solidFill>
+                      <a:prstDash val="solid"/>
+                      <a:round/>
+                      <a:headEnd type="none" w="med" len="med"/>
+                      <a:tailEnd type="none" w="med" len="med"/>
+                    </a:lnR>
+                    <a:lnT w="0" cap="flat" cmpd="sng" algn="ctr">
+                      <a:noFill/>
+                    </a:lnT>
+                    <a:lnB w="12700" cap="flat" cmpd="sng" algn="ctr">
+                      <a:solidFill>
+                        <a:srgbClr val="131928"/>
+                      </a:solidFill>
+                      <a:prstDash val="solid"/>
+                      <a:round/>
+                      <a:headEnd type="none" w="med" len="med"/>
+                      <a:tailEnd type="none" w="med" len="med"/>
+                    </a:lnB>
+                    <a:solidFill>
+                      <a:srgbClr val="131B2E"/>
+                    </a:solidFill>
+                  </a:tcPr>
+                </a:tc>
+                <a:extLst>
+                  <a:ext uri="{0D108BD9-81ED-4DB2-BD59-A6C34878D82A}">
+                    <a16:rowId xmlns:a16="http://schemas.microsoft.com/office/drawing/2014/main" val="10000"/>
+                  </a:ext>
+                </a:extLst>
+              </a:tr>
+              <a:tr h="359304">
+                <a:tc>
+                  <a:txBody>
+                    <a:bodyPr/>
+                    <a:lstStyle/>
+                    <a:p>
+                      <a:pPr marL="0" indent="0">
+                        <a:lnSpc>
+                          <a:spcPts val="1820"/>
+                        </a:lnSpc>
+                        <a:buNone/>
+                      </a:pPr>
+                      <a:r>
+                        <a:rPr lang="en-US" sz="1300" dirty="0">
+                          <a:solidFill>
+                            <a:srgbClr val="C8102E"/>
+                          </a:solidFill>
+                          <a:latin typeface="DM Sans" pitchFamily="34" charset="0"/>
+                          <a:ea typeface="DM Sans" pitchFamily="34" charset="-122"/>
+                          <a:cs typeface="DM Sans" pitchFamily="34" charset="-120"/>
+                        </a:rPr>
+                        <a:t>H1</a:t>
+                      </a:r>
+                      <a:endParaRPr lang="en-US" sz="1300" dirty="0">
+                        <a:latin typeface="DM Sans" charset="0"/>
+                        <a:ea typeface="DM Sans" charset="0"/>
+                        <a:cs typeface="DM Sans" charset="0"/>
+                      </a:endParaRPr>
+                    </a:p>
+                  </a:txBody>
+                  <a:tcPr marL="57785" marR="57785" marT="57785" marB="57785">
+                    <a:lnL w="0" cap="flat" cmpd="sng" algn="ctr">
+                      <a:noFill/>
+                    </a:lnL>
+                    <a:lnR w="12700" cap="flat" cmpd="sng" algn="ctr">
+                      <a:solidFill>
+                        <a:srgbClr val="CBC6C1"/>
+                      </a:solidFill>
+                      <a:prstDash val="solid"/>
+                      <a:round/>
+                      <a:headEnd type="none" w="med" len="med"/>
+                      <a:tailEnd type="none" w="med" len="med"/>
+                    </a:lnR>
+                    <a:lnT w="12700" cap="flat" cmpd="sng" algn="ctr">
+                      <a:solidFill>
+                        <a:srgbClr val="131928"/>
+                      </a:solidFill>
+                      <a:prstDash val="solid"/>
+                      <a:round/>
+                      <a:headEnd type="none" w="med" len="med"/>
+                      <a:tailEnd type="none" w="med" len="med"/>
+                    </a:lnT>
+                    <a:lnB w="12700" cap="flat" cmpd="sng" algn="ctr">
+                      <a:solidFill>
+                        <a:srgbClr val="CBC6C1"/>
+                      </a:solidFill>
+                      <a:prstDash val="solid"/>
+                      <a:round/>
+                      <a:headEnd type="none" w="med" len="med"/>
+                      <a:tailEnd type="none" w="med" len="med"/>
+                    </a:lnB>
+                    <a:solidFill>
+                      <a:srgbClr val="FFF8F2"/>
+                    </a:solidFill>
+                  </a:tcPr>
+                </a:tc>
+                <a:tc>
+                  <a:txBody>
+                    <a:bodyPr/>
+                    <a:lstStyle/>
+                    <a:p>
+                      <a:pPr marL="0" indent="0">
+                        <a:lnSpc>
+                          <a:spcPts val="1820"/>
+                        </a:lnSpc>
+                        <a:buNone/>
+                      </a:pPr>
+                      <a:r>
+                        <a:rPr lang="en-US" sz="1300" dirty="0">
+                          <a:solidFill>
+                            <a:srgbClr val="131B2E"/>
+                          </a:solidFill>
+                          <a:latin typeface="DM Sans" pitchFamily="34" charset="0"/>
+                          <a:ea typeface="DM Sans" pitchFamily="34" charset="-122"/>
+                          <a:cs typeface="DM Sans" pitchFamily="34" charset="-120"/>
+                        </a:rPr>
+                        <a:t>Test termina más que Control</a:t>
+                      </a:r>
+                      <a:endParaRPr lang="en-US" sz="1300" dirty="0">
+                        <a:latin typeface="DM Sans" charset="0"/>
+                        <a:ea typeface="DM Sans" charset="0"/>
+                        <a:cs typeface="DM Sans" charset="0"/>
+                      </a:endParaRPr>
+                    </a:p>
+                  </a:txBody>
+                  <a:tcPr marL="57785" marR="57785" marT="57785" marB="57785">
+                    <a:lnL w="12700" cap="flat" cmpd="sng" algn="ctr">
+                      <a:solidFill>
+                        <a:srgbClr val="CBC6C1"/>
+                      </a:solidFill>
+                      <a:prstDash val="solid"/>
+                      <a:round/>
+                      <a:headEnd type="none" w="med" len="med"/>
+                      <a:tailEnd type="none" w="med" len="med"/>
+                    </a:lnL>
+                    <a:lnR w="12700" cap="flat" cmpd="sng" algn="ctr">
+                      <a:solidFill>
+                        <a:srgbClr val="CBC6C1"/>
+                      </a:solidFill>
+                      <a:prstDash val="solid"/>
+                      <a:round/>
+                      <a:headEnd type="none" w="med" len="med"/>
+                      <a:tailEnd type="none" w="med" len="med"/>
+                    </a:lnR>
+                    <a:lnT w="12700" cap="flat" cmpd="sng" algn="ctr">
+                      <a:solidFill>
+                        <a:srgbClr val="131928"/>
+                      </a:solidFill>
+                      <a:prstDash val="solid"/>
+                      <a:round/>
+                      <a:headEnd type="none" w="med" len="med"/>
+                      <a:tailEnd type="none" w="med" len="med"/>
+                    </a:lnT>
+                    <a:lnB w="12700" cap="flat" cmpd="sng" algn="ctr">
+                      <a:solidFill>
+                        <a:srgbClr val="CBC6C1"/>
+                      </a:solidFill>
+                      <a:prstDash val="solid"/>
+                      <a:round/>
+                      <a:headEnd type="none" w="med" len="med"/>
+                      <a:tailEnd type="none" w="med" len="med"/>
+                    </a:lnB>
+                    <a:solidFill>
+                      <a:srgbClr val="FFF8F2"/>
+                    </a:solidFill>
+                  </a:tcPr>
+                </a:tc>
+                <a:tc>
+                  <a:txBody>
+                    <a:bodyPr/>
+                    <a:lstStyle/>
+                    <a:p>
+                      <a:pPr marL="0" indent="0">
+                        <a:lnSpc>
+                          <a:spcPts val="1820"/>
+                        </a:lnSpc>
+                        <a:buNone/>
+                      </a:pPr>
+                      <a:r>
+                        <a:rPr lang="en-US" sz="1300" dirty="0">
+                          <a:solidFill>
+                            <a:srgbClr val="131B2E"/>
+                          </a:solidFill>
+                          <a:latin typeface="DM Sans" pitchFamily="34" charset="0"/>
+                          <a:ea typeface="DM Sans" pitchFamily="34" charset="-122"/>
+                          <a:cs typeface="DM Sans" pitchFamily="34" charset="-120"/>
+                        </a:rPr>
+                        <a:t>Z, 2 proporciones</a:t>
+                      </a:r>
+                      <a:endParaRPr lang="en-US" sz="1300" dirty="0">
+                        <a:latin typeface="DM Sans" charset="0"/>
+                        <a:ea typeface="DM Sans" charset="0"/>
+                        <a:cs typeface="DM Sans" charset="0"/>
+                      </a:endParaRPr>
+                    </a:p>
+                  </a:txBody>
+                  <a:tcPr marL="57785" marR="57785" marT="57785" marB="57785">
+                    <a:lnL w="12700" cap="flat" cmpd="sng" algn="ctr">
+                      <a:solidFill>
+                        <a:srgbClr val="CBC6C1"/>
+                      </a:solidFill>
+                      <a:prstDash val="solid"/>
+                      <a:round/>
+                      <a:headEnd type="none" w="med" len="med"/>
+                      <a:tailEnd type="none" w="med" len="med"/>
+                    </a:lnL>
+                    <a:lnR w="12700" cap="flat" cmpd="sng" algn="ctr">
+                      <a:solidFill>
+                        <a:srgbClr val="CBC6C1"/>
+                      </a:solidFill>
+                      <a:prstDash val="solid"/>
+                      <a:round/>
+                      <a:headEnd type="none" w="med" len="med"/>
+                      <a:tailEnd type="none" w="med" len="med"/>
+                    </a:lnR>
+                    <a:lnT w="12700" cap="flat" cmpd="sng" algn="ctr">
+                      <a:solidFill>
+                        <a:srgbClr val="131928"/>
+                      </a:solidFill>
+                      <a:prstDash val="solid"/>
+                      <a:round/>
+                      <a:headEnd type="none" w="med" len="med"/>
+                      <a:tailEnd type="none" w="med" len="med"/>
+                    </a:lnT>
+                    <a:lnB w="12700" cap="flat" cmpd="sng" algn="ctr">
+                      <a:solidFill>
+                        <a:srgbClr val="CBC6C1"/>
+                      </a:solidFill>
+                      <a:prstDash val="solid"/>
+                      <a:round/>
+                      <a:headEnd type="none" w="med" len="med"/>
+                      <a:tailEnd type="none" w="med" len="med"/>
+                    </a:lnB>
+                    <a:solidFill>
+                      <a:srgbClr val="FFF8F2"/>
+                    </a:solidFill>
+                  </a:tcPr>
+                </a:tc>
+                <a:tc>
+                  <a:txBody>
+                    <a:bodyPr/>
+                    <a:lstStyle/>
+                    <a:p>
+                      <a:pPr marL="0" indent="0">
+                        <a:lnSpc>
+                          <a:spcPts val="1820"/>
+                        </a:lnSpc>
+                        <a:buNone/>
+                      </a:pPr>
+                      <a:r>
+                        <a:rPr lang="en-US" sz="1300" dirty="0">
+                          <a:solidFill>
+                            <a:srgbClr val="131B2E"/>
+                          </a:solidFill>
+                          <a:latin typeface="DM Sans" pitchFamily="34" charset="0"/>
+                          <a:ea typeface="DM Sans" pitchFamily="34" charset="-122"/>
+                          <a:cs typeface="DM Sans" pitchFamily="34" charset="-120"/>
+                        </a:rPr>
+                        <a:t>z = 8,87 · p &lt; 0,001</a:t>
+                      </a:r>
+                      <a:endParaRPr lang="en-US" sz="1300" dirty="0">
+                        <a:latin typeface="DM Sans" charset="0"/>
+                        <a:ea typeface="DM Sans" charset="0"/>
+                        <a:cs typeface="DM Sans" charset="0"/>
+                      </a:endParaRPr>
+                    </a:p>
+                  </a:txBody>
+                  <a:tcPr marL="57785" marR="57785" marT="57785" marB="57785">
+                    <a:lnL w="12700" cap="flat" cmpd="sng" algn="ctr">
+                      <a:solidFill>
+                        <a:srgbClr val="CBC6C1"/>
+                      </a:solidFill>
+                      <a:prstDash val="solid"/>
+                      <a:round/>
+                      <a:headEnd type="none" w="med" len="med"/>
+                      <a:tailEnd type="none" w="med" len="med"/>
+                    </a:lnL>
+                    <a:lnR w="12700" cap="flat" cmpd="sng" algn="ctr">
+                      <a:solidFill>
+                        <a:srgbClr val="CBC6C1"/>
+                      </a:solidFill>
+                      <a:prstDash val="solid"/>
+                      <a:round/>
+                      <a:headEnd type="none" w="med" len="med"/>
+                      <a:tailEnd type="none" w="med" len="med"/>
+                    </a:lnR>
+                    <a:lnT w="12700" cap="flat" cmpd="sng" algn="ctr">
+                      <a:solidFill>
+                        <a:srgbClr val="131928"/>
+                      </a:solidFill>
+                      <a:prstDash val="solid"/>
+                      <a:round/>
+                      <a:headEnd type="none" w="med" len="med"/>
+                      <a:tailEnd type="none" w="med" len="med"/>
+                    </a:lnT>
+                    <a:lnB w="12700" cap="flat" cmpd="sng" algn="ctr">
+                      <a:solidFill>
+                        <a:srgbClr val="CBC6C1"/>
+                      </a:solidFill>
+                      <a:prstDash val="solid"/>
+                      <a:round/>
+                      <a:headEnd type="none" w="med" len="med"/>
+                      <a:tailEnd type="none" w="med" len="med"/>
+                    </a:lnB>
+                    <a:solidFill>
+                      <a:srgbClr val="FFF8F2"/>
+                    </a:solidFill>
+                  </a:tcPr>
+                </a:tc>
+                <a:tc>
+                  <a:txBody>
+                    <a:bodyPr/>
+                    <a:lstStyle/>
+                    <a:p>
+                      <a:pPr marL="0" indent="0">
+                        <a:lnSpc>
+                          <a:spcPts val="1820"/>
+                        </a:lnSpc>
+                        <a:buNone/>
+                      </a:pPr>
+                      <a:r>
+                        <a:rPr lang="en-US" sz="1300" dirty="0">
+                          <a:solidFill>
+                            <a:srgbClr val="1F6E43"/>
+                          </a:solidFill>
+                          <a:latin typeface="DM Sans" pitchFamily="34" charset="0"/>
+                          <a:ea typeface="DM Sans" pitchFamily="34" charset="-122"/>
+                          <a:cs typeface="DM Sans" pitchFamily="34" charset="-120"/>
+                        </a:rPr>
+                        <a:t>Sí, mejora</a:t>
+                      </a:r>
+                      <a:endParaRPr lang="en-US" sz="1300" dirty="0">
+                        <a:latin typeface="DM Sans" charset="0"/>
+                        <a:ea typeface="DM Sans" charset="0"/>
+                        <a:cs typeface="DM Sans" charset="0"/>
+                      </a:endParaRPr>
+                    </a:p>
+                  </a:txBody>
+                  <a:tcPr marL="57785" marR="57785" marT="57785" marB="57785">
+                    <a:lnL w="12700" cap="flat" cmpd="sng" algn="ctr">
+                      <a:solidFill>
+                        <a:srgbClr val="CBC6C1"/>
+                      </a:solidFill>
+                      <a:prstDash val="solid"/>
+                      <a:round/>
+                      <a:headEnd type="none" w="med" len="med"/>
+                      <a:tailEnd type="none" w="med" len="med"/>
+                    </a:lnL>
+                    <a:lnR w="12700" cap="flat" cmpd="sng" algn="ctr">
+                      <a:solidFill>
+                        <a:srgbClr val="CBC6C1"/>
+                      </a:solidFill>
+                      <a:prstDash val="solid"/>
+                      <a:round/>
+                      <a:headEnd type="none" w="med" len="med"/>
+                      <a:tailEnd type="none" w="med" len="med"/>
+                    </a:lnR>
+                    <a:lnT w="12700" cap="flat" cmpd="sng" algn="ctr">
+                      <a:solidFill>
+                        <a:srgbClr val="131928"/>
+                      </a:solidFill>
+                      <a:prstDash val="solid"/>
+                      <a:round/>
+                      <a:headEnd type="none" w="med" len="med"/>
+                      <a:tailEnd type="none" w="med" len="med"/>
+                    </a:lnT>
+                    <a:lnB w="12700" cap="flat" cmpd="sng" algn="ctr">
+                      <a:solidFill>
+                        <a:srgbClr val="CBC6C1"/>
+                      </a:solidFill>
+                      <a:prstDash val="solid"/>
+                      <a:round/>
+                      <a:headEnd type="none" w="med" len="med"/>
+                      <a:tailEnd type="none" w="med" len="med"/>
+                    </a:lnB>
+                    <a:solidFill>
+                      <a:srgbClr val="FFF8F2"/>
+                    </a:solidFill>
+                  </a:tcPr>
+                </a:tc>
+                <a:extLst>
+                  <a:ext uri="{0D108BD9-81ED-4DB2-BD59-A6C34878D82A}">
+                    <a16:rowId xmlns:a16="http://schemas.microsoft.com/office/drawing/2014/main" val="10001"/>
+                  </a:ext>
+                </a:extLst>
+              </a:tr>
+              <a:tr h="359304">
+                <a:tc>
+                  <a:txBody>
+                    <a:bodyPr/>
+                    <a:lstStyle/>
+                    <a:p>
+                      <a:pPr marL="0" indent="0">
+                        <a:lnSpc>
+                          <a:spcPts val="1820"/>
+                        </a:lnSpc>
+                        <a:buNone/>
+                      </a:pPr>
+                      <a:r>
+                        <a:rPr lang="en-US" sz="1300" dirty="0">
+                          <a:solidFill>
+                            <a:srgbClr val="C8102E"/>
+                          </a:solidFill>
+                          <a:latin typeface="DM Sans" pitchFamily="34" charset="0"/>
+                          <a:ea typeface="DM Sans" pitchFamily="34" charset="-122"/>
+                          <a:cs typeface="DM Sans" pitchFamily="34" charset="-120"/>
+                        </a:rPr>
+                        <a:t>H2</a:t>
+                      </a:r>
+                      <a:endParaRPr lang="en-US" sz="1300" dirty="0">
+                        <a:latin typeface="DM Sans" charset="0"/>
+                        <a:ea typeface="DM Sans" charset="0"/>
+                        <a:cs typeface="DM Sans" charset="0"/>
+                      </a:endParaRPr>
+                    </a:p>
+                  </a:txBody>
+                  <a:tcPr marL="57785" marR="57785" marT="57785" marB="57785">
+                    <a:lnL w="0" cap="flat" cmpd="sng" algn="ctr">
+                      <a:noFill/>
+                    </a:lnL>
+                    <a:lnR w="12700" cap="flat" cmpd="sng" algn="ctr">
+                      <a:solidFill>
+                        <a:srgbClr val="CBC6C1"/>
+                      </a:solidFill>
+                      <a:prstDash val="solid"/>
+                      <a:round/>
+                      <a:headEnd type="none" w="med" len="med"/>
+                      <a:tailEnd type="none" w="med" len="med"/>
+                    </a:lnR>
+                    <a:lnT w="12700" cap="flat" cmpd="sng" algn="ctr">
+                      <a:solidFill>
+                        <a:srgbClr val="CBC6C1"/>
+                      </a:solidFill>
+                      <a:prstDash val="solid"/>
+                      <a:round/>
+                      <a:headEnd type="none" w="med" len="med"/>
+                      <a:tailEnd type="none" w="med" len="med"/>
+                    </a:lnT>
+                    <a:lnB w="12700" cap="flat" cmpd="sng" algn="ctr">
+                      <a:solidFill>
+                        <a:srgbClr val="CBC6C1"/>
+                      </a:solidFill>
+                      <a:prstDash val="solid"/>
+                      <a:round/>
+                      <a:headEnd type="none" w="med" len="med"/>
+                      <a:tailEnd type="none" w="med" len="med"/>
+                    </a:lnB>
+                    <a:solidFill>
+                      <a:srgbClr val="FFF8F2"/>
+                    </a:solidFill>
+                  </a:tcPr>
+                </a:tc>
+                <a:tc>
+                  <a:txBody>
+                    <a:bodyPr/>
+                    <a:lstStyle/>
+                    <a:p>
+                      <a:pPr marL="0" indent="0">
+                        <a:lnSpc>
+                          <a:spcPts val="1820"/>
+                        </a:lnSpc>
+                        <a:buNone/>
+                      </a:pPr>
+                      <a:r>
+                        <a:rPr lang="en-US" sz="1300" dirty="0">
+                          <a:solidFill>
+                            <a:srgbClr val="131B2E"/>
+                          </a:solidFill>
+                          <a:latin typeface="DM Sans" pitchFamily="34" charset="0"/>
+                          <a:ea typeface="DM Sans" pitchFamily="34" charset="-122"/>
+                          <a:cs typeface="DM Sans" pitchFamily="34" charset="-120"/>
+                        </a:rPr>
+                        <a:t>La mejora supera el 5 %</a:t>
+                      </a:r>
+                      <a:endParaRPr lang="en-US" sz="1300" dirty="0">
+                        <a:latin typeface="DM Sans" charset="0"/>
+                        <a:ea typeface="DM Sans" charset="0"/>
+                        <a:cs typeface="DM Sans" charset="0"/>
+                      </a:endParaRPr>
+                    </a:p>
+                  </a:txBody>
+                  <a:tcPr marL="57785" marR="57785" marT="57785" marB="57785">
+                    <a:lnL w="12700" cap="flat" cmpd="sng" algn="ctr">
+                      <a:solidFill>
+                        <a:srgbClr val="CBC6C1"/>
+                      </a:solidFill>
+                      <a:prstDash val="solid"/>
+                      <a:round/>
+                      <a:headEnd type="none" w="med" len="med"/>
+                      <a:tailEnd type="none" w="med" len="med"/>
+                    </a:lnL>
+                    <a:lnR w="12700" cap="flat" cmpd="sng" algn="ctr">
+                      <a:solidFill>
+                        <a:srgbClr val="CBC6C1"/>
+                      </a:solidFill>
+                      <a:prstDash val="solid"/>
+                      <a:round/>
+                      <a:headEnd type="none" w="med" len="med"/>
+                      <a:tailEnd type="none" w="med" len="med"/>
+                    </a:lnR>
+                    <a:lnT w="12700" cap="flat" cmpd="sng" algn="ctr">
+                      <a:solidFill>
+                        <a:srgbClr val="CBC6C1"/>
+                      </a:solidFill>
+                      <a:prstDash val="solid"/>
+                      <a:round/>
+                      <a:headEnd type="none" w="med" len="med"/>
+                      <a:tailEnd type="none" w="med" len="med"/>
+                    </a:lnT>
+                    <a:lnB w="12700" cap="flat" cmpd="sng" algn="ctr">
+                      <a:solidFill>
+                        <a:srgbClr val="CBC6C1"/>
+                      </a:solidFill>
+                      <a:prstDash val="solid"/>
+                      <a:round/>
+                      <a:headEnd type="none" w="med" len="med"/>
+                      <a:tailEnd type="none" w="med" len="med"/>
+                    </a:lnB>
+                    <a:solidFill>
+                      <a:srgbClr val="FFF8F2"/>
+                    </a:solidFill>
+                  </a:tcPr>
+                </a:tc>
+                <a:tc>
+                  <a:txBody>
+                    <a:bodyPr/>
+                    <a:lstStyle/>
+                    <a:p>
+                      <a:pPr marL="0" indent="0">
+                        <a:lnSpc>
+                          <a:spcPts val="1820"/>
+                        </a:lnSpc>
+                        <a:buNone/>
+                      </a:pPr>
+                      <a:r>
+                        <a:rPr lang="en-US" sz="1300" dirty="0">
+                          <a:solidFill>
+                            <a:srgbClr val="131B2E"/>
+                          </a:solidFill>
+                          <a:latin typeface="DM Sans" pitchFamily="34" charset="0"/>
+                          <a:ea typeface="DM Sans" pitchFamily="34" charset="-122"/>
+                          <a:cs typeface="DM Sans" pitchFamily="34" charset="-120"/>
+                        </a:rPr>
+                        <a:t>Z, unilateral</a:t>
+                      </a:r>
+                      <a:endParaRPr lang="en-US" sz="1300" dirty="0">
+                        <a:latin typeface="DM Sans" charset="0"/>
+                        <a:ea typeface="DM Sans" charset="0"/>
+                        <a:cs typeface="DM Sans" charset="0"/>
+                      </a:endParaRPr>
+                    </a:p>
+                  </a:txBody>
+                  <a:tcPr marL="57785" marR="57785" marT="57785" marB="57785">
+                    <a:lnL w="12700" cap="flat" cmpd="sng" algn="ctr">
+                      <a:solidFill>
+                        <a:srgbClr val="CBC6C1"/>
+                      </a:solidFill>
+                      <a:prstDash val="solid"/>
+                      <a:round/>
+                      <a:headEnd type="none" w="med" len="med"/>
+                      <a:tailEnd type="none" w="med" len="med"/>
+                    </a:lnL>
+                    <a:lnR w="12700" cap="flat" cmpd="sng" algn="ctr">
+                      <a:solidFill>
+                        <a:srgbClr val="CBC6C1"/>
+                      </a:solidFill>
+                      <a:prstDash val="solid"/>
+                      <a:round/>
+                      <a:headEnd type="none" w="med" len="med"/>
+                      <a:tailEnd type="none" w="med" len="med"/>
+                    </a:lnR>
+                    <a:lnT w="12700" cap="flat" cmpd="sng" algn="ctr">
+                      <a:solidFill>
+                        <a:srgbClr val="CBC6C1"/>
+                      </a:solidFill>
+                      <a:prstDash val="solid"/>
+                      <a:round/>
+                      <a:headEnd type="none" w="med" len="med"/>
+                      <a:tailEnd type="none" w="med" len="med"/>
+                    </a:lnT>
+                    <a:lnB w="12700" cap="flat" cmpd="sng" algn="ctr">
+                      <a:solidFill>
+                        <a:srgbClr val="CBC6C1"/>
+                      </a:solidFill>
+                      <a:prstDash val="solid"/>
+                      <a:round/>
+                      <a:headEnd type="none" w="med" len="med"/>
+                      <a:tailEnd type="none" w="med" len="med"/>
+                    </a:lnB>
+                    <a:solidFill>
+                      <a:srgbClr val="FFF8F2"/>
+                    </a:solidFill>
+                  </a:tcPr>
+                </a:tc>
+                <a:tc>
+                  <a:txBody>
+                    <a:bodyPr/>
+                    <a:lstStyle/>
+                    <a:p>
+                      <a:pPr marL="0" indent="0">
+                        <a:lnSpc>
+                          <a:spcPts val="1820"/>
+                        </a:lnSpc>
+                        <a:buNone/>
+                      </a:pPr>
+                      <a:r>
+                        <a:rPr lang="en-US" sz="1300" dirty="0">
+                          <a:solidFill>
+                            <a:srgbClr val="131B2E"/>
+                          </a:solidFill>
+                          <a:latin typeface="DM Sans" pitchFamily="34" charset="0"/>
+                          <a:ea typeface="DM Sans" pitchFamily="34" charset="-122"/>
+                          <a:cs typeface="DM Sans" pitchFamily="34" charset="-120"/>
+                        </a:rPr>
+                        <a:t>z = 0,99 · p = 0,16</a:t>
+                      </a:r>
+                      <a:endParaRPr lang="en-US" sz="1300" dirty="0">
+                        <a:latin typeface="DM Sans" charset="0"/>
+                        <a:ea typeface="DM Sans" charset="0"/>
+                        <a:cs typeface="DM Sans" charset="0"/>
+                      </a:endParaRPr>
+                    </a:p>
+                  </a:txBody>
+                  <a:tcPr marL="57785" marR="57785" marT="57785" marB="57785">
+                    <a:lnL w="12700" cap="flat" cmpd="sng" algn="ctr">
+                      <a:solidFill>
+                        <a:srgbClr val="CBC6C1"/>
+                      </a:solidFill>
+                      <a:prstDash val="solid"/>
+                      <a:round/>
+                      <a:headEnd type="none" w="med" len="med"/>
+                      <a:tailEnd type="none" w="med" len="med"/>
+                    </a:lnL>
+                    <a:lnR w="12700" cap="flat" cmpd="sng" algn="ctr">
+                      <a:solidFill>
+                        <a:srgbClr val="CBC6C1"/>
+                      </a:solidFill>
+                      <a:prstDash val="solid"/>
+                      <a:round/>
+                      <a:headEnd type="none" w="med" len="med"/>
+                      <a:tailEnd type="none" w="med" len="med"/>
+                    </a:lnR>
+                    <a:lnT w="12700" cap="flat" cmpd="sng" algn="ctr">
+                      <a:solidFill>
+                        <a:srgbClr val="CBC6C1"/>
+                      </a:solidFill>
+                      <a:prstDash val="solid"/>
+                      <a:round/>
+                      <a:headEnd type="none" w="med" len="med"/>
+                      <a:tailEnd type="none" w="med" len="med"/>
+                    </a:lnT>
+                    <a:lnB w="12700" cap="flat" cmpd="sng" algn="ctr">
+                      <a:solidFill>
+                        <a:srgbClr val="CBC6C1"/>
+                      </a:solidFill>
+                      <a:prstDash val="solid"/>
+                      <a:round/>
+                      <a:headEnd type="none" w="med" len="med"/>
+                      <a:tailEnd type="none" w="med" len="med"/>
+                    </a:lnB>
+                    <a:solidFill>
+                      <a:srgbClr val="FFF8F2"/>
+                    </a:solidFill>
+                  </a:tcPr>
+                </a:tc>
+                <a:tc>
+                  <a:txBody>
+                    <a:bodyPr/>
+                    <a:lstStyle/>
+                    <a:p>
+                      <a:pPr marL="0" indent="0">
+                        <a:lnSpc>
+                          <a:spcPts val="1820"/>
+                        </a:lnSpc>
+                        <a:buNone/>
+                      </a:pPr>
+                      <a:r>
+                        <a:rPr lang="en-US" sz="1300" dirty="0">
+                          <a:solidFill>
+                            <a:srgbClr val="B0102A"/>
+                          </a:solidFill>
+                          <a:latin typeface="DM Sans" pitchFamily="34" charset="0"/>
+                          <a:ea typeface="DM Sans" pitchFamily="34" charset="-122"/>
+                          <a:cs typeface="DM Sans" pitchFamily="34" charset="-120"/>
+                        </a:rPr>
+                        <a:t>No demostrado</a:t>
+                      </a:r>
+                      <a:endParaRPr lang="en-US" sz="1300" dirty="0">
+                        <a:latin typeface="DM Sans" charset="0"/>
+                        <a:ea typeface="DM Sans" charset="0"/>
+                        <a:cs typeface="DM Sans" charset="0"/>
+                      </a:endParaRPr>
+                    </a:p>
+                  </a:txBody>
+                  <a:tcPr marL="57785" marR="57785" marT="57785" marB="57785">
+                    <a:lnL w="12700" cap="flat" cmpd="sng" algn="ctr">
+                      <a:solidFill>
+                        <a:srgbClr val="CBC6C1"/>
+                      </a:solidFill>
+                      <a:prstDash val="solid"/>
+                      <a:round/>
+                      <a:headEnd type="none" w="med" len="med"/>
+                      <a:tailEnd type="none" w="med" len="med"/>
+                    </a:lnL>
+                    <a:lnR w="12700" cap="flat" cmpd="sng" algn="ctr">
+                      <a:solidFill>
+                        <a:srgbClr val="CBC6C1"/>
+                      </a:solidFill>
+                      <a:prstDash val="solid"/>
+                      <a:round/>
+                      <a:headEnd type="none" w="med" len="med"/>
+                      <a:tailEnd type="none" w="med" len="med"/>
+                    </a:lnR>
+                    <a:lnT w="12700" cap="flat" cmpd="sng" algn="ctr">
+                      <a:solidFill>
+                        <a:srgbClr val="CBC6C1"/>
+                      </a:solidFill>
+                      <a:prstDash val="solid"/>
+                      <a:round/>
+                      <a:headEnd type="none" w="med" len="med"/>
+                      <a:tailEnd type="none" w="med" len="med"/>
+                    </a:lnT>
+                    <a:lnB w="12700" cap="flat" cmpd="sng" algn="ctr">
+                      <a:solidFill>
+                        <a:srgbClr val="CBC6C1"/>
+                      </a:solidFill>
+                      <a:prstDash val="solid"/>
+                      <a:round/>
+                      <a:headEnd type="none" w="med" len="med"/>
+                      <a:tailEnd type="none" w="med" len="med"/>
+                    </a:lnB>
+                    <a:solidFill>
+                      <a:srgbClr val="FFF8F2"/>
+                    </a:solidFill>
+                  </a:tcPr>
+                </a:tc>
+                <a:extLst>
+                  <a:ext uri="{0D108BD9-81ED-4DB2-BD59-A6C34878D82A}">
+                    <a16:rowId xmlns:a16="http://schemas.microsoft.com/office/drawing/2014/main" val="10002"/>
+                  </a:ext>
+                </a:extLst>
+              </a:tr>
+              <a:tr h="359304">
+                <a:tc>
+                  <a:txBody>
+                    <a:bodyPr/>
+                    <a:lstStyle/>
+                    <a:p>
+                      <a:pPr marL="0" indent="0">
+                        <a:lnSpc>
+                          <a:spcPts val="1820"/>
+                        </a:lnSpc>
+                        <a:buNone/>
+                      </a:pPr>
+                      <a:r>
+                        <a:rPr lang="en-US" sz="1300" dirty="0">
+                          <a:solidFill>
+                            <a:srgbClr val="6B7285"/>
+                          </a:solidFill>
+                          <a:latin typeface="DM Sans" pitchFamily="34" charset="0"/>
+                          <a:ea typeface="DM Sans" pitchFamily="34" charset="-122"/>
+                          <a:cs typeface="DM Sans" pitchFamily="34" charset="-120"/>
+                        </a:rPr>
+                        <a:t>H3</a:t>
+                      </a:r>
+                      <a:endParaRPr lang="en-US" sz="1300" dirty="0">
+                        <a:latin typeface="DM Sans" charset="0"/>
+                        <a:ea typeface="DM Sans" charset="0"/>
+                        <a:cs typeface="DM Sans" charset="0"/>
+                      </a:endParaRPr>
+                    </a:p>
+                  </a:txBody>
+                  <a:tcPr marL="57785" marR="57785" marT="57785" marB="57785">
+                    <a:lnL w="0" cap="flat" cmpd="sng" algn="ctr">
+                      <a:noFill/>
+                    </a:lnL>
+                    <a:lnR w="12700" cap="flat" cmpd="sng" algn="ctr">
+                      <a:solidFill>
+                        <a:srgbClr val="C4C1BC"/>
+                      </a:solidFill>
+                      <a:prstDash val="solid"/>
+                      <a:round/>
+                      <a:headEnd type="none" w="med" len="med"/>
+                      <a:tailEnd type="none" w="med" len="med"/>
+                    </a:lnR>
+                    <a:lnT w="12700" cap="flat" cmpd="sng" algn="ctr">
+                      <a:solidFill>
+                        <a:srgbClr val="CBC6C1"/>
+                      </a:solidFill>
+                      <a:prstDash val="solid"/>
+                      <a:round/>
+                      <a:headEnd type="none" w="med" len="med"/>
+                      <a:tailEnd type="none" w="med" len="med"/>
+                    </a:lnT>
+                    <a:lnB w="12700" cap="flat" cmpd="sng" algn="ctr">
+                      <a:solidFill>
+                        <a:srgbClr val="C4C1BC"/>
+                      </a:solidFill>
+                      <a:prstDash val="solid"/>
+                      <a:round/>
+                      <a:headEnd type="none" w="med" len="med"/>
+                      <a:tailEnd type="none" w="med" len="med"/>
+                    </a:lnB>
+                  </a:tcPr>
+                </a:tc>
+                <a:tc>
+                  <a:txBody>
+                    <a:bodyPr/>
+                    <a:lstStyle/>
+                    <a:p>
+                      <a:pPr marL="0" indent="0">
+                        <a:lnSpc>
+                          <a:spcPts val="1820"/>
+                        </a:lnSpc>
+                        <a:buNone/>
+                      </a:pPr>
+                      <a:r>
+                        <a:rPr lang="en-US" sz="1300" dirty="0">
+                          <a:solidFill>
+                            <a:srgbClr val="131B2E"/>
+                          </a:solidFill>
+                          <a:latin typeface="DM Sans" pitchFamily="34" charset="0"/>
+                          <a:ea typeface="DM Sans" pitchFamily="34" charset="-122"/>
+                          <a:cs typeface="DM Sans" pitchFamily="34" charset="-120"/>
+                        </a:rPr>
+                        <a:t>Misma edad media en ambos</a:t>
+                      </a:r>
+                      <a:endParaRPr lang="en-US" sz="1300" dirty="0">
+                        <a:latin typeface="DM Sans" charset="0"/>
+                        <a:ea typeface="DM Sans" charset="0"/>
+                        <a:cs typeface="DM Sans" charset="0"/>
+                      </a:endParaRPr>
+                    </a:p>
+                  </a:txBody>
+                  <a:tcPr marL="57785" marR="57785" marT="57785" marB="57785">
+                    <a:lnL w="12700" cap="flat" cmpd="sng" algn="ctr">
+                      <a:solidFill>
+                        <a:srgbClr val="C4C1BC"/>
+                      </a:solidFill>
+                      <a:prstDash val="solid"/>
+                      <a:round/>
+                      <a:headEnd type="none" w="med" len="med"/>
+                      <a:tailEnd type="none" w="med" len="med"/>
+                    </a:lnL>
+                    <a:lnR w="12700" cap="flat" cmpd="sng" algn="ctr">
+                      <a:solidFill>
+                        <a:srgbClr val="C4C1BC"/>
+                      </a:solidFill>
+                      <a:prstDash val="solid"/>
+                      <a:round/>
+                      <a:headEnd type="none" w="med" len="med"/>
+                      <a:tailEnd type="none" w="med" len="med"/>
+                    </a:lnR>
+                    <a:lnT w="12700" cap="flat" cmpd="sng" algn="ctr">
+                      <a:solidFill>
+                        <a:srgbClr val="CBC6C1"/>
+                      </a:solidFill>
+                      <a:prstDash val="solid"/>
+                      <a:round/>
+                      <a:headEnd type="none" w="med" len="med"/>
+                      <a:tailEnd type="none" w="med" len="med"/>
+                    </a:lnT>
+                    <a:lnB w="12700" cap="flat" cmpd="sng" algn="ctr">
+                      <a:solidFill>
+                        <a:srgbClr val="C4C1BC"/>
+                      </a:solidFill>
+                      <a:prstDash val="solid"/>
+                      <a:round/>
+                      <a:headEnd type="none" w="med" len="med"/>
+                      <a:tailEnd type="none" w="med" len="med"/>
+                    </a:lnB>
+                  </a:tcPr>
+                </a:tc>
+                <a:tc>
+                  <a:txBody>
+                    <a:bodyPr/>
+                    <a:lstStyle/>
+                    <a:p>
+                      <a:pPr marL="0" indent="0">
+                        <a:lnSpc>
+                          <a:spcPts val="1820"/>
+                        </a:lnSpc>
+                        <a:buNone/>
+                      </a:pPr>
+                      <a:r>
+                        <a:rPr lang="en-US" sz="1300" dirty="0">
+                          <a:solidFill>
+                            <a:srgbClr val="131B2E"/>
+                          </a:solidFill>
+                          <a:latin typeface="DM Sans" pitchFamily="34" charset="0"/>
+                          <a:ea typeface="DM Sans" pitchFamily="34" charset="-122"/>
+                          <a:cs typeface="DM Sans" pitchFamily="34" charset="-120"/>
+                        </a:rPr>
+                        <a:t>t de Welch</a:t>
+                      </a:r>
+                      <a:endParaRPr lang="en-US" sz="1300" dirty="0">
+                        <a:latin typeface="DM Sans" charset="0"/>
+                        <a:ea typeface="DM Sans" charset="0"/>
+                        <a:cs typeface="DM Sans" charset="0"/>
+                      </a:endParaRPr>
+                    </a:p>
+                  </a:txBody>
+                  <a:tcPr marL="57785" marR="57785" marT="57785" marB="57785">
+                    <a:lnL w="12700" cap="flat" cmpd="sng" algn="ctr">
+                      <a:solidFill>
+                        <a:srgbClr val="C4C1BC"/>
+                      </a:solidFill>
+                      <a:prstDash val="solid"/>
+                      <a:round/>
+                      <a:headEnd type="none" w="med" len="med"/>
+                      <a:tailEnd type="none" w="med" len="med"/>
+                    </a:lnL>
+                    <a:lnR w="12700" cap="flat" cmpd="sng" algn="ctr">
+                      <a:solidFill>
+                        <a:srgbClr val="C4C1BC"/>
+                      </a:solidFill>
+                      <a:prstDash val="solid"/>
+                      <a:round/>
+                      <a:headEnd type="none" w="med" len="med"/>
+                      <a:tailEnd type="none" w="med" len="med"/>
+                    </a:lnR>
+                    <a:lnT w="12700" cap="flat" cmpd="sng" algn="ctr">
+                      <a:solidFill>
+                        <a:srgbClr val="CBC6C1"/>
+                      </a:solidFill>
+                      <a:prstDash val="solid"/>
+                      <a:round/>
+                      <a:headEnd type="none" w="med" len="med"/>
+                      <a:tailEnd type="none" w="med" len="med"/>
+                    </a:lnT>
+                    <a:lnB w="12700" cap="flat" cmpd="sng" algn="ctr">
+                      <a:solidFill>
+                        <a:srgbClr val="C4C1BC"/>
+                      </a:solidFill>
+                      <a:prstDash val="solid"/>
+                      <a:round/>
+                      <a:headEnd type="none" w="med" len="med"/>
+                      <a:tailEnd type="none" w="med" len="med"/>
+                    </a:lnB>
+                  </a:tcPr>
+                </a:tc>
+                <a:tc>
+                  <a:txBody>
+                    <a:bodyPr/>
+                    <a:lstStyle/>
+                    <a:p>
+                      <a:pPr marL="0" indent="0">
+                        <a:lnSpc>
+                          <a:spcPts val="1820"/>
+                        </a:lnSpc>
+                        <a:buNone/>
+                      </a:pPr>
+                      <a:r>
+                        <a:rPr lang="en-US" sz="1300" dirty="0">
+                          <a:solidFill>
+                            <a:srgbClr val="131B2E"/>
+                          </a:solidFill>
+                          <a:latin typeface="DM Sans" pitchFamily="34" charset="0"/>
+                          <a:ea typeface="DM Sans" pitchFamily="34" charset="-122"/>
+                          <a:cs typeface="DM Sans" pitchFamily="34" charset="-120"/>
+                        </a:rPr>
+                        <a:t>t = −2,42 · p = 0,016</a:t>
+                      </a:r>
+                      <a:endParaRPr lang="en-US" sz="1300" dirty="0">
+                        <a:latin typeface="DM Sans" charset="0"/>
+                        <a:ea typeface="DM Sans" charset="0"/>
+                        <a:cs typeface="DM Sans" charset="0"/>
+                      </a:endParaRPr>
+                    </a:p>
+                  </a:txBody>
+                  <a:tcPr marL="57785" marR="57785" marT="57785" marB="57785">
+                    <a:lnL w="12700" cap="flat" cmpd="sng" algn="ctr">
+                      <a:solidFill>
+                        <a:srgbClr val="C4C1BC"/>
+                      </a:solidFill>
+                      <a:prstDash val="solid"/>
+                      <a:round/>
+                      <a:headEnd type="none" w="med" len="med"/>
+                      <a:tailEnd type="none" w="med" len="med"/>
+                    </a:lnL>
+                    <a:lnR w="12700" cap="flat" cmpd="sng" algn="ctr">
+                      <a:solidFill>
+                        <a:srgbClr val="C4C1BC"/>
+                      </a:solidFill>
+                      <a:prstDash val="solid"/>
+                      <a:round/>
+                      <a:headEnd type="none" w="med" len="med"/>
+                      <a:tailEnd type="none" w="med" len="med"/>
+                    </a:lnR>
+                    <a:lnT w="12700" cap="flat" cmpd="sng" algn="ctr">
+                      <a:solidFill>
+                        <a:srgbClr val="CBC6C1"/>
+                      </a:solidFill>
+                      <a:prstDash val="solid"/>
+                      <a:round/>
+                      <a:headEnd type="none" w="med" len="med"/>
+                      <a:tailEnd type="none" w="med" len="med"/>
+                    </a:lnT>
+                    <a:lnB w="12700" cap="flat" cmpd="sng" algn="ctr">
+                      <a:solidFill>
+                        <a:srgbClr val="C4C1BC"/>
+                      </a:solidFill>
+                      <a:prstDash val="solid"/>
+                      <a:round/>
+                      <a:headEnd type="none" w="med" len="med"/>
+                      <a:tailEnd type="none" w="med" len="med"/>
+                    </a:lnB>
+                  </a:tcPr>
+                </a:tc>
+                <a:tc>
+                  <a:txBody>
+                    <a:bodyPr/>
+                    <a:lstStyle/>
+                    <a:p>
+                      <a:pPr marL="0" indent="0">
+                        <a:lnSpc>
+                          <a:spcPts val="1820"/>
+                        </a:lnSpc>
+                        <a:buNone/>
+                      </a:pPr>
+                      <a:r>
+                        <a:rPr lang="en-US" sz="1300" dirty="0">
+                          <a:solidFill>
+                            <a:srgbClr val="131B2E"/>
+                          </a:solidFill>
+                          <a:latin typeface="DM Sans" pitchFamily="34" charset="0"/>
+                          <a:ea typeface="DM Sans" pitchFamily="34" charset="-122"/>
+                          <a:cs typeface="DM Sans" pitchFamily="34" charset="-120"/>
+                        </a:rPr>
+                        <a:t>Mínima: 0,34 años</a:t>
+                      </a:r>
+                      <a:endParaRPr lang="en-US" sz="1300" dirty="0">
+                        <a:latin typeface="DM Sans" charset="0"/>
+                        <a:ea typeface="DM Sans" charset="0"/>
+                        <a:cs typeface="DM Sans" charset="0"/>
+                      </a:endParaRPr>
+                    </a:p>
+                  </a:txBody>
+                  <a:tcPr marL="57785" marR="57785" marT="57785" marB="57785">
+                    <a:lnL w="12700" cap="flat" cmpd="sng" algn="ctr">
+                      <a:solidFill>
+                        <a:srgbClr val="C4C1BC"/>
+                      </a:solidFill>
+                      <a:prstDash val="solid"/>
+                      <a:round/>
+                      <a:headEnd type="none" w="med" len="med"/>
+                      <a:tailEnd type="none" w="med" len="med"/>
+                    </a:lnL>
+                    <a:lnR w="12700" cap="flat" cmpd="sng" algn="ctr">
+                      <a:solidFill>
+                        <a:srgbClr val="C4C1BC"/>
+                      </a:solidFill>
+                      <a:prstDash val="solid"/>
+                      <a:round/>
+                      <a:headEnd type="none" w="med" len="med"/>
+                      <a:tailEnd type="none" w="med" len="med"/>
+                    </a:lnR>
+                    <a:lnT w="12700" cap="flat" cmpd="sng" algn="ctr">
+                      <a:solidFill>
+                        <a:srgbClr val="CBC6C1"/>
+                      </a:solidFill>
+                      <a:prstDash val="solid"/>
+                      <a:round/>
+                      <a:headEnd type="none" w="med" len="med"/>
+                      <a:tailEnd type="none" w="med" len="med"/>
+                    </a:lnT>
+                    <a:lnB w="12700" cap="flat" cmpd="sng" algn="ctr">
+                      <a:solidFill>
+                        <a:srgbClr val="C4C1BC"/>
+                      </a:solidFill>
+                      <a:prstDash val="solid"/>
+                      <a:round/>
+                      <a:headEnd type="none" w="med" len="med"/>
+                      <a:tailEnd type="none" w="med" len="med"/>
+                    </a:lnB>
+                  </a:tcPr>
+                </a:tc>
+                <a:extLst>
+                  <a:ext uri="{0D108BD9-81ED-4DB2-BD59-A6C34878D82A}">
+                    <a16:rowId xmlns:a16="http://schemas.microsoft.com/office/drawing/2014/main" val="10003"/>
+                  </a:ext>
+                </a:extLst>
+              </a:tr>
+              <a:tr h="359304">
+                <a:tc>
+                  <a:txBody>
+                    <a:bodyPr/>
+                    <a:lstStyle/>
+                    <a:p>
+                      <a:pPr marL="0" indent="0">
+                        <a:lnSpc>
+                          <a:spcPts val="1820"/>
+                        </a:lnSpc>
+                        <a:buNone/>
+                      </a:pPr>
+                      <a:r>
+                        <a:rPr lang="en-US" sz="1300" dirty="0">
+                          <a:solidFill>
+                            <a:srgbClr val="6B7285"/>
+                          </a:solidFill>
+                          <a:latin typeface="DM Sans" pitchFamily="34" charset="0"/>
+                          <a:ea typeface="DM Sans" pitchFamily="34" charset="-122"/>
+                          <a:cs typeface="DM Sans" pitchFamily="34" charset="-120"/>
+                        </a:rPr>
+                        <a:t>H4</a:t>
+                      </a:r>
+                      <a:endParaRPr lang="en-US" sz="1300" dirty="0">
+                        <a:latin typeface="DM Sans" charset="0"/>
+                        <a:ea typeface="DM Sans" charset="0"/>
+                        <a:cs typeface="DM Sans" charset="0"/>
+                      </a:endParaRPr>
+                    </a:p>
+                  </a:txBody>
+                  <a:tcPr marL="57785" marR="57785" marT="57785" marB="57785">
+                    <a:lnL w="0" cap="flat" cmpd="sng" algn="ctr">
+                      <a:noFill/>
+                    </a:lnL>
+                    <a:lnR w="12700" cap="flat" cmpd="sng" algn="ctr">
+                      <a:solidFill>
+                        <a:srgbClr val="C4C1BC"/>
+                      </a:solidFill>
+                      <a:prstDash val="solid"/>
+                      <a:round/>
+                      <a:headEnd type="none" w="med" len="med"/>
+                      <a:tailEnd type="none" w="med" len="med"/>
+                    </a:lnR>
+                    <a:lnT w="12700" cap="flat" cmpd="sng" algn="ctr">
+                      <a:solidFill>
+                        <a:srgbClr val="C4C1BC"/>
+                      </a:solidFill>
+                      <a:prstDash val="solid"/>
+                      <a:round/>
+                      <a:headEnd type="none" w="med" len="med"/>
+                      <a:tailEnd type="none" w="med" len="med"/>
+                    </a:lnT>
+                    <a:lnB w="12700" cap="flat" cmpd="sng" algn="ctr">
+                      <a:solidFill>
+                        <a:srgbClr val="C4C1BC"/>
+                      </a:solidFill>
+                      <a:prstDash val="solid"/>
+                      <a:round/>
+                      <a:headEnd type="none" w="med" len="med"/>
+                      <a:tailEnd type="none" w="med" len="med"/>
+                    </a:lnB>
+                  </a:tcPr>
+                </a:tc>
+                <a:tc>
+                  <a:txBody>
+                    <a:bodyPr/>
+                    <a:lstStyle/>
+                    <a:p>
+                      <a:pPr marL="0" indent="0">
+                        <a:lnSpc>
+                          <a:spcPts val="1820"/>
+                        </a:lnSpc>
+                        <a:buNone/>
+                      </a:pPr>
+                      <a:r>
+                        <a:rPr lang="en-US" sz="1300" dirty="0">
+                          <a:solidFill>
+                            <a:srgbClr val="131B2E"/>
+                          </a:solidFill>
+                          <a:latin typeface="DM Sans" pitchFamily="34" charset="0"/>
+                          <a:ea typeface="DM Sans" pitchFamily="34" charset="-122"/>
+                          <a:cs typeface="DM Sans" pitchFamily="34" charset="-120"/>
+                        </a:rPr>
+                        <a:t>Misma tasa de error</a:t>
+                      </a:r>
+                      <a:endParaRPr lang="en-US" sz="1300" dirty="0">
+                        <a:latin typeface="DM Sans" charset="0"/>
+                        <a:ea typeface="DM Sans" charset="0"/>
+                        <a:cs typeface="DM Sans" charset="0"/>
+                      </a:endParaRPr>
+                    </a:p>
+                  </a:txBody>
+                  <a:tcPr marL="57785" marR="57785" marT="57785" marB="57785">
+                    <a:lnL w="12700" cap="flat" cmpd="sng" algn="ctr">
+                      <a:solidFill>
+                        <a:srgbClr val="C4C1BC"/>
+                      </a:solidFill>
+                      <a:prstDash val="solid"/>
+                      <a:round/>
+                      <a:headEnd type="none" w="med" len="med"/>
+                      <a:tailEnd type="none" w="med" len="med"/>
+                    </a:lnL>
+                    <a:lnR w="12700" cap="flat" cmpd="sng" algn="ctr">
+                      <a:solidFill>
+                        <a:srgbClr val="C4C1BC"/>
+                      </a:solidFill>
+                      <a:prstDash val="solid"/>
+                      <a:round/>
+                      <a:headEnd type="none" w="med" len="med"/>
+                      <a:tailEnd type="none" w="med" len="med"/>
+                    </a:lnR>
+                    <a:lnT w="12700" cap="flat" cmpd="sng" algn="ctr">
+                      <a:solidFill>
+                        <a:srgbClr val="C4C1BC"/>
+                      </a:solidFill>
+                      <a:prstDash val="solid"/>
+                      <a:round/>
+                      <a:headEnd type="none" w="med" len="med"/>
+                      <a:tailEnd type="none" w="med" len="med"/>
+                    </a:lnT>
+                    <a:lnB w="12700" cap="flat" cmpd="sng" algn="ctr">
+                      <a:solidFill>
+                        <a:srgbClr val="C4C1BC"/>
+                      </a:solidFill>
+                      <a:prstDash val="solid"/>
+                      <a:round/>
+                      <a:headEnd type="none" w="med" len="med"/>
+                      <a:tailEnd type="none" w="med" len="med"/>
+                    </a:lnB>
+                  </a:tcPr>
+                </a:tc>
+                <a:tc>
+                  <a:txBody>
+                    <a:bodyPr/>
+                    <a:lstStyle/>
+                    <a:p>
+                      <a:pPr marL="0" indent="0">
+                        <a:lnSpc>
+                          <a:spcPts val="1820"/>
+                        </a:lnSpc>
+                        <a:buNone/>
+                      </a:pPr>
+                      <a:r>
+                        <a:rPr lang="en-US" sz="1300" dirty="0">
+                          <a:solidFill>
+                            <a:srgbClr val="131B2E"/>
+                          </a:solidFill>
+                          <a:latin typeface="DM Sans" pitchFamily="34" charset="0"/>
+                          <a:ea typeface="DM Sans" pitchFamily="34" charset="-122"/>
+                          <a:cs typeface="DM Sans" pitchFamily="34" charset="-120"/>
+                        </a:rPr>
+                        <a:t>Z, 2 proporciones</a:t>
+                      </a:r>
+                      <a:endParaRPr lang="en-US" sz="1300" dirty="0">
+                        <a:latin typeface="DM Sans" charset="0"/>
+                        <a:ea typeface="DM Sans" charset="0"/>
+                        <a:cs typeface="DM Sans" charset="0"/>
+                      </a:endParaRPr>
+                    </a:p>
+                  </a:txBody>
+                  <a:tcPr marL="57785" marR="57785" marT="57785" marB="57785">
+                    <a:lnL w="12700" cap="flat" cmpd="sng" algn="ctr">
+                      <a:solidFill>
+                        <a:srgbClr val="C4C1BC"/>
+                      </a:solidFill>
+                      <a:prstDash val="solid"/>
+                      <a:round/>
+                      <a:headEnd type="none" w="med" len="med"/>
+                      <a:tailEnd type="none" w="med" len="med"/>
+                    </a:lnL>
+                    <a:lnR w="12700" cap="flat" cmpd="sng" algn="ctr">
+                      <a:solidFill>
+                        <a:srgbClr val="C4C1BC"/>
+                      </a:solidFill>
+                      <a:prstDash val="solid"/>
+                      <a:round/>
+                      <a:headEnd type="none" w="med" len="med"/>
+                      <a:tailEnd type="none" w="med" len="med"/>
+                    </a:lnR>
+                    <a:lnT w="12700" cap="flat" cmpd="sng" algn="ctr">
+                      <a:solidFill>
+                        <a:srgbClr val="C4C1BC"/>
+                      </a:solidFill>
+                      <a:prstDash val="solid"/>
+                      <a:round/>
+                      <a:headEnd type="none" w="med" len="med"/>
+                      <a:tailEnd type="none" w="med" len="med"/>
+                    </a:lnT>
+                    <a:lnB w="12700" cap="flat" cmpd="sng" algn="ctr">
+                      <a:solidFill>
+                        <a:srgbClr val="C4C1BC"/>
+                      </a:solidFill>
+                      <a:prstDash val="solid"/>
+                      <a:round/>
+                      <a:headEnd type="none" w="med" len="med"/>
+                      <a:tailEnd type="none" w="med" len="med"/>
+                    </a:lnB>
+                  </a:tcPr>
+                </a:tc>
+                <a:tc>
+                  <a:txBody>
+                    <a:bodyPr/>
+                    <a:lstStyle/>
+                    <a:p>
+                      <a:pPr marL="0" indent="0">
+                        <a:lnSpc>
+                          <a:spcPts val="1820"/>
+                        </a:lnSpc>
+                        <a:buNone/>
+                      </a:pPr>
+                      <a:r>
+                        <a:rPr lang="en-US" sz="1300" dirty="0">
+                          <a:solidFill>
+                            <a:srgbClr val="131B2E"/>
+                          </a:solidFill>
+                          <a:latin typeface="DM Sans" pitchFamily="34" charset="0"/>
+                          <a:ea typeface="DM Sans" pitchFamily="34" charset="-122"/>
+                          <a:cs typeface="DM Sans" pitchFamily="34" charset="-120"/>
+                        </a:rPr>
+                        <a:t>p &lt; 0,001</a:t>
+                      </a:r>
+                      <a:endParaRPr lang="en-US" sz="1300" dirty="0">
+                        <a:latin typeface="DM Sans" charset="0"/>
+                        <a:ea typeface="DM Sans" charset="0"/>
+                        <a:cs typeface="DM Sans" charset="0"/>
+                      </a:endParaRPr>
+                    </a:p>
+                  </a:txBody>
+                  <a:tcPr marL="57785" marR="57785" marT="57785" marB="57785">
+                    <a:lnL w="12700" cap="flat" cmpd="sng" algn="ctr">
+                      <a:solidFill>
+                        <a:srgbClr val="C4C1BC"/>
+                      </a:solidFill>
+                      <a:prstDash val="solid"/>
+                      <a:round/>
+                      <a:headEnd type="none" w="med" len="med"/>
+                      <a:tailEnd type="none" w="med" len="med"/>
+                    </a:lnL>
+                    <a:lnR w="12700" cap="flat" cmpd="sng" algn="ctr">
+                      <a:solidFill>
+                        <a:srgbClr val="C4C1BC"/>
+                      </a:solidFill>
+                      <a:prstDash val="solid"/>
+                      <a:round/>
+                      <a:headEnd type="none" w="med" len="med"/>
+                      <a:tailEnd type="none" w="med" len="med"/>
+                    </a:lnR>
+                    <a:lnT w="12700" cap="flat" cmpd="sng" algn="ctr">
+                      <a:solidFill>
+                        <a:srgbClr val="C4C1BC"/>
+                      </a:solidFill>
+                      <a:prstDash val="solid"/>
+                      <a:round/>
+                      <a:headEnd type="none" w="med" len="med"/>
+                      <a:tailEnd type="none" w="med" len="med"/>
+                    </a:lnT>
+                    <a:lnB w="12700" cap="flat" cmpd="sng" algn="ctr">
+                      <a:solidFill>
+                        <a:srgbClr val="C4C1BC"/>
+                      </a:solidFill>
+                      <a:prstDash val="solid"/>
+                      <a:round/>
+                      <a:headEnd type="none" w="med" len="med"/>
+                      <a:tailEnd type="none" w="med" len="med"/>
+                    </a:lnB>
+                  </a:tcPr>
+                </a:tc>
+                <a:tc>
+                  <a:txBody>
+                    <a:bodyPr/>
+                    <a:lstStyle/>
+                    <a:p>
+                      <a:pPr marL="0" indent="0">
+                        <a:lnSpc>
+                          <a:spcPts val="1820"/>
+                        </a:lnSpc>
+                        <a:buNone/>
+                      </a:pPr>
+                      <a:r>
+                        <a:rPr lang="en-US" sz="1300" dirty="0">
+                          <a:solidFill>
+                            <a:srgbClr val="131B2E"/>
+                          </a:solidFill>
+                          <a:latin typeface="DM Sans" pitchFamily="34" charset="0"/>
+                          <a:ea typeface="DM Sans" pitchFamily="34" charset="-122"/>
+                          <a:cs typeface="DM Sans" pitchFamily="34" charset="-120"/>
+                        </a:rPr>
+                        <a:t>Test, más errores</a:t>
+                      </a:r>
+                      <a:endParaRPr lang="en-US" sz="1300" dirty="0">
+                        <a:latin typeface="DM Sans" charset="0"/>
+                        <a:ea typeface="DM Sans" charset="0"/>
+                        <a:cs typeface="DM Sans" charset="0"/>
+                      </a:endParaRPr>
+                    </a:p>
+                  </a:txBody>
+                  <a:tcPr marL="57785" marR="57785" marT="57785" marB="57785">
+                    <a:lnL w="12700" cap="flat" cmpd="sng" algn="ctr">
+                      <a:solidFill>
+                        <a:srgbClr val="C4C1BC"/>
+                      </a:solidFill>
+                      <a:prstDash val="solid"/>
+                      <a:round/>
+                      <a:headEnd type="none" w="med" len="med"/>
+                      <a:tailEnd type="none" w="med" len="med"/>
+                    </a:lnL>
+                    <a:lnR w="12700" cap="flat" cmpd="sng" algn="ctr">
+                      <a:solidFill>
+                        <a:srgbClr val="C4C1BC"/>
+                      </a:solidFill>
+                      <a:prstDash val="solid"/>
+                      <a:round/>
+                      <a:headEnd type="none" w="med" len="med"/>
+                      <a:tailEnd type="none" w="med" len="med"/>
+                    </a:lnR>
+                    <a:lnT w="12700" cap="flat" cmpd="sng" algn="ctr">
+                      <a:solidFill>
+                        <a:srgbClr val="C4C1BC"/>
+                      </a:solidFill>
+                      <a:prstDash val="solid"/>
+                      <a:round/>
+                      <a:headEnd type="none" w="med" len="med"/>
+                      <a:tailEnd type="none" w="med" len="med"/>
+                    </a:lnT>
+                    <a:lnB w="12700" cap="flat" cmpd="sng" algn="ctr">
+                      <a:solidFill>
+                        <a:srgbClr val="C4C1BC"/>
+                      </a:solidFill>
+                      <a:prstDash val="solid"/>
+                      <a:round/>
+                      <a:headEnd type="none" w="med" len="med"/>
+                      <a:tailEnd type="none" w="med" len="med"/>
+                    </a:lnB>
+                  </a:tcPr>
+                </a:tc>
+                <a:extLst>
+                  <a:ext uri="{0D108BD9-81ED-4DB2-BD59-A6C34878D82A}">
+                    <a16:rowId xmlns:a16="http://schemas.microsoft.com/office/drawing/2014/main" val="10004"/>
+                  </a:ext>
+                </a:extLst>
+              </a:tr>
+              <a:tr h="359304">
+                <a:tc>
+                  <a:txBody>
+                    <a:bodyPr/>
+                    <a:lstStyle/>
+                    <a:p>
+                      <a:pPr marL="0" indent="0">
+                        <a:lnSpc>
+                          <a:spcPts val="1820"/>
+                        </a:lnSpc>
+                        <a:buNone/>
+                      </a:pPr>
+                      <a:r>
+                        <a:rPr lang="en-US" sz="1300" dirty="0">
+                          <a:solidFill>
+                            <a:srgbClr val="6B7285"/>
+                          </a:solidFill>
+                          <a:latin typeface="DM Sans" pitchFamily="34" charset="0"/>
+                          <a:ea typeface="DM Sans" pitchFamily="34" charset="-122"/>
+                          <a:cs typeface="DM Sans" pitchFamily="34" charset="-120"/>
+                        </a:rPr>
+                        <a:t>H5</a:t>
+                      </a:r>
+                      <a:endParaRPr lang="en-US" sz="1300" dirty="0">
+                        <a:latin typeface="DM Sans" charset="0"/>
+                        <a:ea typeface="DM Sans" charset="0"/>
+                        <a:cs typeface="DM Sans" charset="0"/>
+                      </a:endParaRPr>
+                    </a:p>
+                  </a:txBody>
+                  <a:tcPr marL="57785" marR="57785" marT="57785" marB="57785">
+                    <a:lnL w="0" cap="flat" cmpd="sng" algn="ctr">
+                      <a:noFill/>
+                    </a:lnL>
+                    <a:lnR w="12700" cap="flat" cmpd="sng" algn="ctr">
+                      <a:solidFill>
+                        <a:srgbClr val="C4C1BC"/>
+                      </a:solidFill>
+                      <a:prstDash val="solid"/>
+                      <a:round/>
+                      <a:headEnd type="none" w="med" len="med"/>
+                      <a:tailEnd type="none" w="med" len="med"/>
+                    </a:lnR>
+                    <a:lnT w="12700" cap="flat" cmpd="sng" algn="ctr">
+                      <a:solidFill>
+                        <a:srgbClr val="C4C1BC"/>
+                      </a:solidFill>
+                      <a:prstDash val="solid"/>
+                      <a:round/>
+                      <a:headEnd type="none" w="med" len="med"/>
+                      <a:tailEnd type="none" w="med" len="med"/>
+                    </a:lnT>
+                    <a:lnB w="12700" cap="flat" cmpd="sng" algn="ctr">
+                      <a:solidFill>
+                        <a:srgbClr val="C4C1BC"/>
+                      </a:solidFill>
+                      <a:prstDash val="solid"/>
+                      <a:round/>
+                      <a:headEnd type="none" w="med" len="med"/>
+                      <a:tailEnd type="none" w="med" len="med"/>
+                    </a:lnB>
+                  </a:tcPr>
+                </a:tc>
+                <a:tc>
+                  <a:txBody>
+                    <a:bodyPr/>
+                    <a:lstStyle/>
+                    <a:p>
+                      <a:pPr marL="0" indent="0">
+                        <a:lnSpc>
+                          <a:spcPts val="1820"/>
+                        </a:lnSpc>
+                        <a:buNone/>
+                      </a:pPr>
+                      <a:r>
+                        <a:rPr lang="en-US" sz="1300" dirty="0">
+                          <a:solidFill>
+                            <a:srgbClr val="131B2E"/>
+                          </a:solidFill>
+                          <a:latin typeface="DM Sans" pitchFamily="34" charset="0"/>
+                          <a:ea typeface="DM Sans" pitchFamily="34" charset="-122"/>
+                          <a:cs typeface="DM Sans" pitchFamily="34" charset="-120"/>
+                        </a:rPr>
+                        <a:t>Paso alcanzado y diseño</a:t>
+                      </a:r>
+                      <a:endParaRPr lang="en-US" sz="1300" dirty="0">
+                        <a:latin typeface="DM Sans" charset="0"/>
+                        <a:ea typeface="DM Sans" charset="0"/>
+                        <a:cs typeface="DM Sans" charset="0"/>
+                      </a:endParaRPr>
+                    </a:p>
+                  </a:txBody>
+                  <a:tcPr marL="57785" marR="57785" marT="57785" marB="57785">
+                    <a:lnL w="12700" cap="flat" cmpd="sng" algn="ctr">
+                      <a:solidFill>
+                        <a:srgbClr val="C4C1BC"/>
+                      </a:solidFill>
+                      <a:prstDash val="solid"/>
+                      <a:round/>
+                      <a:headEnd type="none" w="med" len="med"/>
+                      <a:tailEnd type="none" w="med" len="med"/>
+                    </a:lnL>
+                    <a:lnR w="12700" cap="flat" cmpd="sng" algn="ctr">
+                      <a:solidFill>
+                        <a:srgbClr val="C4C1BC"/>
+                      </a:solidFill>
+                      <a:prstDash val="solid"/>
+                      <a:round/>
+                      <a:headEnd type="none" w="med" len="med"/>
+                      <a:tailEnd type="none" w="med" len="med"/>
+                    </a:lnR>
+                    <a:lnT w="12700" cap="flat" cmpd="sng" algn="ctr">
+                      <a:solidFill>
+                        <a:srgbClr val="C4C1BC"/>
+                      </a:solidFill>
+                      <a:prstDash val="solid"/>
+                      <a:round/>
+                      <a:headEnd type="none" w="med" len="med"/>
+                      <a:tailEnd type="none" w="med" len="med"/>
+                    </a:lnT>
+                    <a:lnB w="12700" cap="flat" cmpd="sng" algn="ctr">
+                      <a:solidFill>
+                        <a:srgbClr val="C4C1BC"/>
+                      </a:solidFill>
+                      <a:prstDash val="solid"/>
+                      <a:round/>
+                      <a:headEnd type="none" w="med" len="med"/>
+                      <a:tailEnd type="none" w="med" len="med"/>
+                    </a:lnB>
+                  </a:tcPr>
+                </a:tc>
+                <a:tc>
+                  <a:txBody>
+                    <a:bodyPr/>
+                    <a:lstStyle/>
+                    <a:p>
+                      <a:pPr marL="0" indent="0">
+                        <a:lnSpc>
+                          <a:spcPts val="1820"/>
+                        </a:lnSpc>
+                        <a:buNone/>
+                      </a:pPr>
+                      <a:r>
+                        <a:rPr lang="en-US" sz="1300" dirty="0">
+                          <a:solidFill>
+                            <a:srgbClr val="131B2E"/>
+                          </a:solidFill>
+                          <a:latin typeface="DM Sans" pitchFamily="34" charset="0"/>
+                          <a:ea typeface="DM Sans" pitchFamily="34" charset="-122"/>
+                          <a:cs typeface="DM Sans" pitchFamily="34" charset="-120"/>
+                        </a:rPr>
+                        <a:t>Chi-cuadrado</a:t>
+                      </a:r>
+                      <a:endParaRPr lang="en-US" sz="1300" dirty="0">
+                        <a:latin typeface="DM Sans" charset="0"/>
+                        <a:ea typeface="DM Sans" charset="0"/>
+                        <a:cs typeface="DM Sans" charset="0"/>
+                      </a:endParaRPr>
+                    </a:p>
+                  </a:txBody>
+                  <a:tcPr marL="57785" marR="57785" marT="57785" marB="57785">
+                    <a:lnL w="12700" cap="flat" cmpd="sng" algn="ctr">
+                      <a:solidFill>
+                        <a:srgbClr val="C4C1BC"/>
+                      </a:solidFill>
+                      <a:prstDash val="solid"/>
+                      <a:round/>
+                      <a:headEnd type="none" w="med" len="med"/>
+                      <a:tailEnd type="none" w="med" len="med"/>
+                    </a:lnL>
+                    <a:lnR w="12700" cap="flat" cmpd="sng" algn="ctr">
+                      <a:solidFill>
+                        <a:srgbClr val="C4C1BC"/>
+                      </a:solidFill>
+                      <a:prstDash val="solid"/>
+                      <a:round/>
+                      <a:headEnd type="none" w="med" len="med"/>
+                      <a:tailEnd type="none" w="med" len="med"/>
+                    </a:lnR>
+                    <a:lnT w="12700" cap="flat" cmpd="sng" algn="ctr">
+                      <a:solidFill>
+                        <a:srgbClr val="C4C1BC"/>
+                      </a:solidFill>
+                      <a:prstDash val="solid"/>
+                      <a:round/>
+                      <a:headEnd type="none" w="med" len="med"/>
+                      <a:tailEnd type="none" w="med" len="med"/>
+                    </a:lnT>
+                    <a:lnB w="12700" cap="flat" cmpd="sng" algn="ctr">
+                      <a:solidFill>
+                        <a:srgbClr val="C4C1BC"/>
+                      </a:solidFill>
+                      <a:prstDash val="solid"/>
+                      <a:round/>
+                      <a:headEnd type="none" w="med" len="med"/>
+                      <a:tailEnd type="none" w="med" len="med"/>
+                    </a:lnB>
+                  </a:tcPr>
+                </a:tc>
+                <a:tc>
+                  <a:txBody>
+                    <a:bodyPr/>
+                    <a:lstStyle/>
+                    <a:p>
+                      <a:pPr marL="0" indent="0">
+                        <a:lnSpc>
+                          <a:spcPts val="1820"/>
+                        </a:lnSpc>
+                        <a:buNone/>
+                      </a:pPr>
+                      <a:r>
+                        <a:rPr lang="en-US" sz="1300" dirty="0">
+                          <a:solidFill>
+                            <a:srgbClr val="131B2E"/>
+                          </a:solidFill>
+                          <a:latin typeface="DM Sans" pitchFamily="34" charset="0"/>
+                          <a:ea typeface="DM Sans" pitchFamily="34" charset="-122"/>
+                          <a:cs typeface="DM Sans" pitchFamily="34" charset="-120"/>
+                        </a:rPr>
+                        <a:t>χ² = 312 · p &lt; 0,001</a:t>
+                      </a:r>
+                      <a:endParaRPr lang="en-US" sz="1300" dirty="0">
+                        <a:latin typeface="DM Sans" charset="0"/>
+                        <a:ea typeface="DM Sans" charset="0"/>
+                        <a:cs typeface="DM Sans" charset="0"/>
+                      </a:endParaRPr>
+                    </a:p>
+                  </a:txBody>
+                  <a:tcPr marL="57785" marR="57785" marT="57785" marB="57785">
+                    <a:lnL w="12700" cap="flat" cmpd="sng" algn="ctr">
+                      <a:solidFill>
+                        <a:srgbClr val="C4C1BC"/>
+                      </a:solidFill>
+                      <a:prstDash val="solid"/>
+                      <a:round/>
+                      <a:headEnd type="none" w="med" len="med"/>
+                      <a:tailEnd type="none" w="med" len="med"/>
+                    </a:lnL>
+                    <a:lnR w="12700" cap="flat" cmpd="sng" algn="ctr">
+                      <a:solidFill>
+                        <a:srgbClr val="C4C1BC"/>
+                      </a:solidFill>
+                      <a:prstDash val="solid"/>
+                      <a:round/>
+                      <a:headEnd type="none" w="med" len="med"/>
+                      <a:tailEnd type="none" w="med" len="med"/>
+                    </a:lnR>
+                    <a:lnT w="12700" cap="flat" cmpd="sng" algn="ctr">
+                      <a:solidFill>
+                        <a:srgbClr val="C4C1BC"/>
+                      </a:solidFill>
+                      <a:prstDash val="solid"/>
+                      <a:round/>
+                      <a:headEnd type="none" w="med" len="med"/>
+                      <a:tailEnd type="none" w="med" len="med"/>
+                    </a:lnT>
+                    <a:lnB w="12700" cap="flat" cmpd="sng" algn="ctr">
+                      <a:solidFill>
+                        <a:srgbClr val="C4C1BC"/>
+                      </a:solidFill>
+                      <a:prstDash val="solid"/>
+                      <a:round/>
+                      <a:headEnd type="none" w="med" len="med"/>
+                      <a:tailEnd type="none" w="med" len="med"/>
+                    </a:lnB>
+                  </a:tcPr>
+                </a:tc>
+                <a:tc>
+                  <a:txBody>
+                    <a:bodyPr/>
+                    <a:lstStyle/>
+                    <a:p>
+                      <a:pPr marL="0" indent="0">
+                        <a:lnSpc>
+                          <a:spcPts val="1820"/>
+                        </a:lnSpc>
+                        <a:buNone/>
+                      </a:pPr>
+                      <a:r>
+                        <a:rPr lang="en-US" sz="1300" dirty="0">
+                          <a:solidFill>
+                            <a:srgbClr val="131B2E"/>
+                          </a:solidFill>
+                          <a:latin typeface="DM Sans" pitchFamily="34" charset="0"/>
+                          <a:ea typeface="DM Sans" pitchFamily="34" charset="-122"/>
+                          <a:cs typeface="DM Sans" pitchFamily="34" charset="-120"/>
+                        </a:rPr>
+                        <a:t>Depende del diseño</a:t>
+                      </a:r>
+                      <a:endParaRPr lang="en-US" sz="1300" dirty="0">
+                        <a:latin typeface="DM Sans" charset="0"/>
+                        <a:ea typeface="DM Sans" charset="0"/>
+                        <a:cs typeface="DM Sans" charset="0"/>
+                      </a:endParaRPr>
+                    </a:p>
+                  </a:txBody>
+                  <a:tcPr marL="57785" marR="57785" marT="57785" marB="57785">
+                    <a:lnL w="12700" cap="flat" cmpd="sng" algn="ctr">
+                      <a:solidFill>
+                        <a:srgbClr val="C4C1BC"/>
+                      </a:solidFill>
+                      <a:prstDash val="solid"/>
+                      <a:round/>
+                      <a:headEnd type="none" w="med" len="med"/>
+                      <a:tailEnd type="none" w="med" len="med"/>
+                    </a:lnL>
+                    <a:lnR w="12700" cap="flat" cmpd="sng" algn="ctr">
+                      <a:solidFill>
+                        <a:srgbClr val="C4C1BC"/>
+                      </a:solidFill>
+                      <a:prstDash val="solid"/>
+                      <a:round/>
+                      <a:headEnd type="none" w="med" len="med"/>
+                      <a:tailEnd type="none" w="med" len="med"/>
+                    </a:lnR>
+                    <a:lnT w="12700" cap="flat" cmpd="sng" algn="ctr">
+                      <a:solidFill>
+                        <a:srgbClr val="C4C1BC"/>
+                      </a:solidFill>
+                      <a:prstDash val="solid"/>
+                      <a:round/>
+                      <a:headEnd type="none" w="med" len="med"/>
+                      <a:tailEnd type="none" w="med" len="med"/>
+                    </a:lnT>
+                    <a:lnB w="12700" cap="flat" cmpd="sng" algn="ctr">
+                      <a:solidFill>
+                        <a:srgbClr val="C4C1BC"/>
+                      </a:solidFill>
+                      <a:prstDash val="solid"/>
+                      <a:round/>
+                      <a:headEnd type="none" w="med" len="med"/>
+                      <a:tailEnd type="none" w="med" len="med"/>
+                    </a:lnB>
+                  </a:tcPr>
+                </a:tc>
+                <a:extLst>
+                  <a:ext uri="{0D108BD9-81ED-4DB2-BD59-A6C34878D82A}">
+                    <a16:rowId xmlns:a16="http://schemas.microsoft.com/office/drawing/2014/main" val="10005"/>
+                  </a:ext>
+                </a:extLst>
+              </a:tr>
+              <a:tr h="359304">
+                <a:tc>
+                  <a:txBody>
+                    <a:bodyPr/>
+                    <a:lstStyle/>
+                    <a:p>
+                      <a:pPr marL="0" indent="0">
+                        <a:lnSpc>
+                          <a:spcPts val="1820"/>
+                        </a:lnSpc>
+                        <a:buNone/>
+                      </a:pPr>
+                      <a:r>
+                        <a:rPr lang="en-US" sz="1300" dirty="0">
+                          <a:solidFill>
+                            <a:srgbClr val="6B7285"/>
+                          </a:solidFill>
+                          <a:latin typeface="DM Sans" pitchFamily="34" charset="0"/>
+                          <a:ea typeface="DM Sans" pitchFamily="34" charset="-122"/>
+                          <a:cs typeface="DM Sans" pitchFamily="34" charset="-120"/>
+                        </a:rPr>
+                        <a:t>H6</a:t>
+                      </a:r>
+                      <a:endParaRPr lang="en-US" sz="1300" dirty="0">
+                        <a:latin typeface="DM Sans" charset="0"/>
+                        <a:ea typeface="DM Sans" charset="0"/>
+                        <a:cs typeface="DM Sans" charset="0"/>
+                      </a:endParaRPr>
+                    </a:p>
+                  </a:txBody>
+                  <a:tcPr marL="57785" marR="57785" marT="57785" marB="57785">
+                    <a:lnL w="0" cap="flat" cmpd="sng" algn="ctr">
+                      <a:noFill/>
+                    </a:lnL>
+                    <a:lnR w="12700" cap="flat" cmpd="sng" algn="ctr">
+                      <a:solidFill>
+                        <a:srgbClr val="C4C1BC"/>
+                      </a:solidFill>
+                      <a:prstDash val="solid"/>
+                      <a:round/>
+                      <a:headEnd type="none" w="med" len="med"/>
+                      <a:tailEnd type="none" w="med" len="med"/>
+                    </a:lnR>
+                    <a:lnT w="12700" cap="flat" cmpd="sng" algn="ctr">
+                      <a:solidFill>
+                        <a:srgbClr val="C4C1BC"/>
+                      </a:solidFill>
+                      <a:prstDash val="solid"/>
+                      <a:round/>
+                      <a:headEnd type="none" w="med" len="med"/>
+                      <a:tailEnd type="none" w="med" len="med"/>
+                    </a:lnT>
+                    <a:lnB w="12700" cap="flat" cmpd="sng" algn="ctr">
+                      <a:solidFill>
+                        <a:srgbClr val="C4C1BC"/>
+                      </a:solidFill>
+                      <a:prstDash val="solid"/>
+                      <a:round/>
+                      <a:headEnd type="none" w="med" len="med"/>
+                      <a:tailEnd type="none" w="med" len="med"/>
+                    </a:lnB>
+                  </a:tcPr>
+                </a:tc>
+                <a:tc>
+                  <a:txBody>
+                    <a:bodyPr/>
+                    <a:lstStyle/>
+                    <a:p>
+                      <a:pPr marL="0" indent="0">
+                        <a:lnSpc>
+                          <a:spcPts val="1820"/>
+                        </a:lnSpc>
+                        <a:buNone/>
+                      </a:pPr>
+                      <a:r>
+                        <a:rPr lang="en-US" sz="1300" dirty="0">
+                          <a:solidFill>
+                            <a:srgbClr val="131B2E"/>
+                          </a:solidFill>
+                          <a:latin typeface="DM Sans" pitchFamily="34" charset="0"/>
+                          <a:ea typeface="DM Sans" pitchFamily="34" charset="-122"/>
+                          <a:cs typeface="DM Sans" pitchFamily="34" charset="-120"/>
+                        </a:rPr>
+                        <a:t>Género y grupo</a:t>
+                      </a:r>
+                      <a:endParaRPr lang="en-US" sz="1300" dirty="0">
+                        <a:latin typeface="DM Sans" charset="0"/>
+                        <a:ea typeface="DM Sans" charset="0"/>
+                        <a:cs typeface="DM Sans" charset="0"/>
+                      </a:endParaRPr>
+                    </a:p>
+                  </a:txBody>
+                  <a:tcPr marL="57785" marR="57785" marT="57785" marB="57785">
+                    <a:lnL w="12700" cap="flat" cmpd="sng" algn="ctr">
+                      <a:solidFill>
+                        <a:srgbClr val="C4C1BC"/>
+                      </a:solidFill>
+                      <a:prstDash val="solid"/>
+                      <a:round/>
+                      <a:headEnd type="none" w="med" len="med"/>
+                      <a:tailEnd type="none" w="med" len="med"/>
+                    </a:lnL>
+                    <a:lnR w="12700" cap="flat" cmpd="sng" algn="ctr">
+                      <a:solidFill>
+                        <a:srgbClr val="C4C1BC"/>
+                      </a:solidFill>
+                      <a:prstDash val="solid"/>
+                      <a:round/>
+                      <a:headEnd type="none" w="med" len="med"/>
+                      <a:tailEnd type="none" w="med" len="med"/>
+                    </a:lnR>
+                    <a:lnT w="12700" cap="flat" cmpd="sng" algn="ctr">
+                      <a:solidFill>
+                        <a:srgbClr val="C4C1BC"/>
+                      </a:solidFill>
+                      <a:prstDash val="solid"/>
+                      <a:round/>
+                      <a:headEnd type="none" w="med" len="med"/>
+                      <a:tailEnd type="none" w="med" len="med"/>
+                    </a:lnT>
+                    <a:lnB w="12700" cap="flat" cmpd="sng" algn="ctr">
+                      <a:solidFill>
+                        <a:srgbClr val="C4C1BC"/>
+                      </a:solidFill>
+                      <a:prstDash val="solid"/>
+                      <a:round/>
+                      <a:headEnd type="none" w="med" len="med"/>
+                      <a:tailEnd type="none" w="med" len="med"/>
+                    </a:lnB>
+                  </a:tcPr>
+                </a:tc>
+                <a:tc>
+                  <a:txBody>
+                    <a:bodyPr/>
+                    <a:lstStyle/>
+                    <a:p>
+                      <a:pPr marL="0" indent="0">
+                        <a:lnSpc>
+                          <a:spcPts val="1820"/>
+                        </a:lnSpc>
+                        <a:buNone/>
+                      </a:pPr>
+                      <a:r>
+                        <a:rPr lang="en-US" sz="1300" dirty="0">
+                          <a:solidFill>
+                            <a:srgbClr val="131B2E"/>
+                          </a:solidFill>
+                          <a:latin typeface="DM Sans" pitchFamily="34" charset="0"/>
+                          <a:ea typeface="DM Sans" pitchFamily="34" charset="-122"/>
+                          <a:cs typeface="DM Sans" pitchFamily="34" charset="-120"/>
+                        </a:rPr>
+                        <a:t>Chi-cuadrado</a:t>
+                      </a:r>
+                      <a:endParaRPr lang="en-US" sz="1300" dirty="0">
+                        <a:latin typeface="DM Sans" charset="0"/>
+                        <a:ea typeface="DM Sans" charset="0"/>
+                        <a:cs typeface="DM Sans" charset="0"/>
+                      </a:endParaRPr>
+                    </a:p>
+                  </a:txBody>
+                  <a:tcPr marL="57785" marR="57785" marT="57785" marB="57785">
+                    <a:lnL w="12700" cap="flat" cmpd="sng" algn="ctr">
+                      <a:solidFill>
+                        <a:srgbClr val="C4C1BC"/>
+                      </a:solidFill>
+                      <a:prstDash val="solid"/>
+                      <a:round/>
+                      <a:headEnd type="none" w="med" len="med"/>
+                      <a:tailEnd type="none" w="med" len="med"/>
+                    </a:lnL>
+                    <a:lnR w="12700" cap="flat" cmpd="sng" algn="ctr">
+                      <a:solidFill>
+                        <a:srgbClr val="C4C1BC"/>
+                      </a:solidFill>
+                      <a:prstDash val="solid"/>
+                      <a:round/>
+                      <a:headEnd type="none" w="med" len="med"/>
+                      <a:tailEnd type="none" w="med" len="med"/>
+                    </a:lnR>
+                    <a:lnT w="12700" cap="flat" cmpd="sng" algn="ctr">
+                      <a:solidFill>
+                        <a:srgbClr val="C4C1BC"/>
+                      </a:solidFill>
+                      <a:prstDash val="solid"/>
+                      <a:round/>
+                      <a:headEnd type="none" w="med" len="med"/>
+                      <a:tailEnd type="none" w="med" len="med"/>
+                    </a:lnT>
+                    <a:lnB w="12700" cap="flat" cmpd="sng" algn="ctr">
+                      <a:solidFill>
+                        <a:srgbClr val="C4C1BC"/>
+                      </a:solidFill>
+                      <a:prstDash val="solid"/>
+                      <a:round/>
+                      <a:headEnd type="none" w="med" len="med"/>
+                      <a:tailEnd type="none" w="med" len="med"/>
+                    </a:lnB>
+                  </a:tcPr>
+                </a:tc>
+                <a:tc>
+                  <a:txBody>
+                    <a:bodyPr/>
+                    <a:lstStyle/>
+                    <a:p>
+                      <a:pPr marL="0" indent="0">
+                        <a:lnSpc>
+                          <a:spcPts val="1820"/>
+                        </a:lnSpc>
+                        <a:buNone/>
+                      </a:pPr>
+                      <a:r>
+                        <a:rPr lang="en-US" sz="1300" dirty="0">
+                          <a:solidFill>
+                            <a:srgbClr val="131B2E"/>
+                          </a:solidFill>
+                          <a:latin typeface="DM Sans" pitchFamily="34" charset="0"/>
+                          <a:ea typeface="DM Sans" pitchFamily="34" charset="-122"/>
+                          <a:cs typeface="DM Sans" pitchFamily="34" charset="-120"/>
+                        </a:rPr>
+                        <a:t>χ² = 1,89 · p = 0,39</a:t>
+                      </a:r>
+                      <a:endParaRPr lang="en-US" sz="1300" dirty="0">
+                        <a:latin typeface="DM Sans" charset="0"/>
+                        <a:ea typeface="DM Sans" charset="0"/>
+                        <a:cs typeface="DM Sans" charset="0"/>
+                      </a:endParaRPr>
+                    </a:p>
+                  </a:txBody>
+                  <a:tcPr marL="57785" marR="57785" marT="57785" marB="57785">
+                    <a:lnL w="12700" cap="flat" cmpd="sng" algn="ctr">
+                      <a:solidFill>
+                        <a:srgbClr val="C4C1BC"/>
+                      </a:solidFill>
+                      <a:prstDash val="solid"/>
+                      <a:round/>
+                      <a:headEnd type="none" w="med" len="med"/>
+                      <a:tailEnd type="none" w="med" len="med"/>
+                    </a:lnL>
+                    <a:lnR w="12700" cap="flat" cmpd="sng" algn="ctr">
+                      <a:solidFill>
+                        <a:srgbClr val="C4C1BC"/>
+                      </a:solidFill>
+                      <a:prstDash val="solid"/>
+                      <a:round/>
+                      <a:headEnd type="none" w="med" len="med"/>
+                      <a:tailEnd type="none" w="med" len="med"/>
+                    </a:lnR>
+                    <a:lnT w="12700" cap="flat" cmpd="sng" algn="ctr">
+                      <a:solidFill>
+                        <a:srgbClr val="C4C1BC"/>
+                      </a:solidFill>
+                      <a:prstDash val="solid"/>
+                      <a:round/>
+                      <a:headEnd type="none" w="med" len="med"/>
+                      <a:tailEnd type="none" w="med" len="med"/>
+                    </a:lnT>
+                    <a:lnB w="12700" cap="flat" cmpd="sng" algn="ctr">
+                      <a:solidFill>
+                        <a:srgbClr val="C4C1BC"/>
+                      </a:solidFill>
+                      <a:prstDash val="solid"/>
+                      <a:round/>
+                      <a:headEnd type="none" w="med" len="med"/>
+                      <a:tailEnd type="none" w="med" len="med"/>
+                    </a:lnB>
+                  </a:tcPr>
+                </a:tc>
+                <a:tc>
+                  <a:txBody>
+                    <a:bodyPr/>
+                    <a:lstStyle/>
+                    <a:p>
+                      <a:pPr marL="0" indent="0">
+                        <a:lnSpc>
+                          <a:spcPts val="1820"/>
+                        </a:lnSpc>
+                        <a:buNone/>
+                      </a:pPr>
+                      <a:r>
+                        <a:rPr lang="en-US" sz="1300" dirty="0">
+                          <a:solidFill>
+                            <a:srgbClr val="131B2E"/>
+                          </a:solidFill>
+                          <a:latin typeface="DM Sans" pitchFamily="34" charset="0"/>
+                          <a:ea typeface="DM Sans" pitchFamily="34" charset="-122"/>
+                          <a:cs typeface="DM Sans" pitchFamily="34" charset="-120"/>
+                        </a:rPr>
+                        <a:t>Sin diferencias</a:t>
+                      </a:r>
+                      <a:endParaRPr lang="en-US" sz="1300" dirty="0">
+                        <a:latin typeface="DM Sans" charset="0"/>
+                        <a:ea typeface="DM Sans" charset="0"/>
+                        <a:cs typeface="DM Sans" charset="0"/>
+                      </a:endParaRPr>
+                    </a:p>
+                  </a:txBody>
+                  <a:tcPr marL="57785" marR="57785" marT="57785" marB="57785">
+                    <a:lnL w="12700" cap="flat" cmpd="sng" algn="ctr">
+                      <a:solidFill>
+                        <a:srgbClr val="C4C1BC"/>
+                      </a:solidFill>
+                      <a:prstDash val="solid"/>
+                      <a:round/>
+                      <a:headEnd type="none" w="med" len="med"/>
+                      <a:tailEnd type="none" w="med" len="med"/>
+                    </a:lnL>
+                    <a:lnR w="12700" cap="flat" cmpd="sng" algn="ctr">
+                      <a:solidFill>
+                        <a:srgbClr val="C4C1BC"/>
+                      </a:solidFill>
+                      <a:prstDash val="solid"/>
+                      <a:round/>
+                      <a:headEnd type="none" w="med" len="med"/>
+                      <a:tailEnd type="none" w="med" len="med"/>
+                    </a:lnR>
+                    <a:lnT w="12700" cap="flat" cmpd="sng" algn="ctr">
+                      <a:solidFill>
+                        <a:srgbClr val="C4C1BC"/>
+                      </a:solidFill>
+                      <a:prstDash val="solid"/>
+                      <a:round/>
+                      <a:headEnd type="none" w="med" len="med"/>
+                      <a:tailEnd type="none" w="med" len="med"/>
+                    </a:lnT>
+                    <a:lnB w="12700" cap="flat" cmpd="sng" algn="ctr">
+                      <a:solidFill>
+                        <a:srgbClr val="C4C1BC"/>
+                      </a:solidFill>
+                      <a:prstDash val="solid"/>
+                      <a:round/>
+                      <a:headEnd type="none" w="med" len="med"/>
+                      <a:tailEnd type="none" w="med" len="med"/>
+                    </a:lnB>
+                  </a:tcPr>
+                </a:tc>
+                <a:extLst>
+                  <a:ext uri="{0D108BD9-81ED-4DB2-BD59-A6C34878D82A}">
+                    <a16:rowId xmlns:a16="http://schemas.microsoft.com/office/drawing/2014/main" val="10006"/>
+                  </a:ext>
+                </a:extLst>
+              </a:tr>
+            </a:tbl>
+          </a:graphicData>
+        </a:graphic>
+      </p:graphicFrame>
+      <p:sp>
+        <p:nvSpPr>
+          <p:cNvPr id="7" name="Text 4"/>
+          <p:cNvSpPr/>
+          <p:nvPr/>
+        </p:nvSpPr>
+        <p:spPr>
+          <a:xfrm>
+            <a:off x="812800" y="4635965"/>
+            <a:ext cx="9810750" cy="523214"/>
+          </a:xfrm>
+          <a:prstGeom prst="rect">
+            <a:avLst/>
+          </a:prstGeom>
+          <a:noFill/>
+          <a:ln/>
+        </p:spPr>
+        <p:txBody>
+          <a:bodyPr wrap="square" lIns="0" tIns="0" rIns="0" bIns="0" rtlCol="0" anchor="t">
+            <a:normAutofit/>
+          </a:bodyPr>
+          <a:lstStyle/>
+          <a:p>
+            <a:pPr marL="0" indent="0" algn="l">
+              <a:lnSpc>
+                <a:spcPts val="1960"/>
+              </a:lnSpc>
+              <a:buNone/>
+            </a:pPr>
+            <a:r>
+              <a:rPr lang="en-US" sz="1400" dirty="0">
+                <a:solidFill>
+                  <a:srgbClr val="4A5266"/>
+                </a:solidFill>
+                <a:latin typeface="DM Sans" pitchFamily="34" charset="0"/>
+                <a:ea typeface="DM Sans" pitchFamily="34" charset="-122"/>
+                <a:cs typeface="DM Sans" pitchFamily="34" charset="-120"/>
+              </a:rPr>
+              <a:t>Lección clave: con 50.000 clientes casi todo sale «significativo». Por eso miramos también </a:t>
+            </a:r>
+            <a:r>
+              <a:rPr lang="en-US" sz="1400" b="1" dirty="0">
+                <a:solidFill>
+                  <a:srgbClr val="131B2E"/>
+                </a:solidFill>
+                <a:latin typeface="DM Sans" pitchFamily="34" charset="0"/>
+                <a:ea typeface="DM Sans" pitchFamily="34" charset="-122"/>
+                <a:cs typeface="DM Sans" pitchFamily="34" charset="-120"/>
+              </a:rPr>
+              <a:t>si la diferencia importa</a:t>
+            </a:r>
+            <a:r>
+              <a:rPr lang="en-US" sz="1400" dirty="0">
+                <a:solidFill>
+                  <a:srgbClr val="4A5266"/>
+                </a:solidFill>
+                <a:latin typeface="DM Sans" pitchFamily="34" charset="0"/>
+                <a:ea typeface="DM Sans" pitchFamily="34" charset="-122"/>
+                <a:cs typeface="DM Sans" pitchFamily="34" charset="-120"/>
+              </a:rPr>
+              <a:t> (H3: 0,34 años no importa).</a:t>
+            </a:r>
+            <a:endParaRPr lang="en-US" sz="1400" dirty="0"/>
+          </a:p>
+        </p:txBody>
+      </p:sp>
+      <p:sp>
+        <p:nvSpPr>
+          <p:cNvPr id="8" name="Text 5"/>
+          <p:cNvSpPr/>
+          <p:nvPr/>
+        </p:nvSpPr>
+        <p:spPr>
+          <a:xfrm>
+            <a:off x="812800" y="6238280"/>
+            <a:ext cx="7194550" cy="238720"/>
+          </a:xfrm>
+          <a:prstGeom prst="rect">
+            <a:avLst/>
+          </a:prstGeom>
+          <a:noFill/>
+          <a:ln/>
+        </p:spPr>
+        <p:txBody>
+          <a:bodyPr wrap="square" lIns="0" tIns="0" rIns="0" bIns="0" rtlCol="0" anchor="t">
+            <a:normAutofit/>
+          </a:bodyPr>
+          <a:lstStyle/>
+          <a:p>
+            <a:pPr marL="0" indent="0" algn="l">
+              <a:lnSpc>
+                <a:spcPts val="1680"/>
+              </a:lnSpc>
+              <a:buNone/>
+            </a:pPr>
+            <a:endParaRPr lang="en-US" sz="1200" dirty="0"/>
+          </a:p>
+        </p:txBody>
+      </p:sp>
+      <p:sp>
+        <p:nvSpPr>
+          <p:cNvPr id="9" name="Text 6"/>
+          <p:cNvSpPr/>
+          <p:nvPr/>
+        </p:nvSpPr>
+        <p:spPr>
+          <a:xfrm>
+            <a:off x="10058400" y="6238280"/>
+            <a:ext cx="1320800" cy="238720"/>
+          </a:xfrm>
+          <a:prstGeom prst="rect">
+            <a:avLst/>
+          </a:prstGeom>
+          <a:noFill/>
+          <a:ln/>
+        </p:spPr>
+        <p:txBody>
+          <a:bodyPr wrap="square" lIns="0" tIns="0" rIns="0" bIns="0" rtlCol="0" anchor="t">
+            <a:normAutofit/>
+          </a:bodyPr>
+          <a:lstStyle/>
+          <a:p>
+            <a:pPr marL="0" indent="0" algn="r">
+              <a:lnSpc>
+                <a:spcPts val="1680"/>
+              </a:lnSpc>
+              <a:buNone/>
+            </a:pPr>
+            <a:r>
+              <a:rPr lang="en-US" sz="1200" dirty="0">
+                <a:solidFill>
+                  <a:srgbClr val="6B7285"/>
+                </a:solidFill>
+                <a:latin typeface="DM Sans" pitchFamily="34" charset="0"/>
+                <a:ea typeface="DM Sans" pitchFamily="34" charset="-122"/>
+                <a:cs typeface="DM Sans" pitchFamily="34" charset="-120"/>
+              </a:rPr>
+              <a:t>04</a:t>
+            </a:r>
+            <a:endParaRPr lang="en-US" sz="1200" dirty="0"/>
+          </a:p>
+        </p:txBody>
+      </p:sp>
+    </p:spTree>
+  </p:cSld>
+  <p:clrMapOvr>
+    <a:masterClrMapping/>
+  </p:clrMapOvr>
+</p:sld>
+</file>
+
+<file path=ppt/slides/slide5.xml><?xml version="1.0" encoding="utf-8"?>
+<p:sld xmlns:a="http://schemas.openxmlformats.org/drawingml/2006/main" xmlns:r="http://schemas.openxmlformats.org/officeDocument/2006/relationships" xmlns:p="http://schemas.openxmlformats.org/presentationml/2006/main">
   <p:cSld name="Slide 17">
     <p:bg>
       <p:bgPr>
@@ -4991,7 +7880,7 @@
 </p:sld>
 </file>
 
-<file path=ppt/slides/slide5.xml><?xml version="1.0" encoding="utf-8"?>
+<file path=ppt/slides/slide6.xml><?xml version="1.0" encoding="utf-8"?>
 <p:sld xmlns:a="http://schemas.openxmlformats.org/drawingml/2006/main" xmlns:r="http://schemas.openxmlformats.org/officeDocument/2006/relationships" xmlns:p="http://schemas.openxmlformats.org/presentationml/2006/main">
   <p:cSld>
     <p:spTree>
@@ -5844,7 +8733,7 @@
                 <a:ea typeface="DM Sans" pitchFamily="34" charset="-122"/>
                 <a:cs typeface="DM Sans" pitchFamily="34" charset="-120"/>
               </a:rPr>
-              <a:t>05</a:t>
+              <a:t>06</a:t>
             </a:r>
             <a:endParaRPr lang="en-US" sz="1200" dirty="0"/>
           </a:p>
@@ -5858,7 +8747,7 @@
 </p:sld>
 </file>
 
-<file path=ppt/slides/slide6.xml><?xml version="1.0" encoding="utf-8"?>
+<file path=ppt/slides/slide7.xml><?xml version="1.0" encoding="utf-8"?>
 <p:sld xmlns:a="http://schemas.openxmlformats.org/drawingml/2006/main" xmlns:r="http://schemas.openxmlformats.org/officeDocument/2006/relationships" xmlns:p="http://schemas.openxmlformats.org/presentationml/2006/main">
   <p:cSld>
     <p:bg>
@@ -6901,7 +9790,7 @@
                 <a:ea typeface="DM Sans" pitchFamily="34" charset="-122"/>
                 <a:cs typeface="DM Sans" pitchFamily="34" charset="-120"/>
               </a:rPr>
-              <a:t>06</a:t>
+              <a:t>07</a:t>
             </a:r>
             <a:endParaRPr kumimoji="0" lang="en-US" sz="1200" b="0" i="0" u="none" strike="noStrike" kern="1200" cap="none" spc="0" normalizeH="0" baseline="0" noProof="0" dirty="0">
               <a:ln>
@@ -6928,7 +9817,7 @@
 </p:sld>
 </file>
 
-<file path=ppt/slides/slide7.xml><?xml version="1.0" encoding="utf-8"?>
+<file path=ppt/slides/slide8.xml><?xml version="1.0" encoding="utf-8"?>
 <p:sld xmlns:a="http://schemas.openxmlformats.org/drawingml/2006/main" xmlns:r="http://schemas.openxmlformats.org/officeDocument/2006/relationships" xmlns:p="http://schemas.openxmlformats.org/presentationml/2006/main">
   <p:cSld>
     <p:bg>

--- a/outputs/Vanguard_Presentación.pptx
+++ b/outputs/Vanguard_Presentación.pptx
@@ -22,21 +22,14 @@
   <p:notesSz cx="6858000" cy="12192000"/>
   <p:embeddedFontLst>
     <p:embeddedFont>
-      <p:font typeface="Calibri" panose="020F0502020204030204" pitchFamily="34" charset="0"/>
+      <p:font typeface="DM Sans" pitchFamily="2" charset="0"/>
       <p:regular r:id="rId12"/>
       <p:bold r:id="rId13"/>
-      <p:italic r:id="rId14"/>
-      <p:boldItalic r:id="rId15"/>
-    </p:embeddedFont>
-    <p:embeddedFont>
-      <p:font typeface="DM Sans" panose="020B0604020202020204" charset="0"/>
-      <p:regular r:id="rId16"/>
-      <p:bold r:id="rId17"/>
     </p:embeddedFont>
     <p:embeddedFont>
       <p:font typeface="Space Grotesk" panose="020B0604020202020204" charset="0"/>
-      <p:regular r:id="rId18"/>
-      <p:bold r:id="rId19"/>
+      <p:regular r:id="rId14"/>
+      <p:bold r:id="rId15"/>
     </p:embeddedFont>
   </p:embeddedFontLst>
   <p:defaultTextStyle>
@@ -3855,7 +3848,7 @@
                 <a:ea typeface="DM Sans" pitchFamily="34" charset="-122"/>
                 <a:cs typeface="DM Sans" pitchFamily="34" charset="-120"/>
               </a:rPr>
-              <a:t>¿Conseguirá el nuevo diseño que más clientes lleguen hasta el final?</a:t>
+              <a:t>¿Conseguirá el nuevo diseño que más clientes completen el proceso online?</a:t>
             </a:r>
             <a:endParaRPr lang="en-US" sz="1600" dirty="0"/>
           </a:p>
@@ -5035,7 +5028,40 @@
                 <a:ea typeface="Space Grotesk" pitchFamily="34" charset="-122"/>
                 <a:cs typeface="Space Grotesk" pitchFamily="34" charset="-120"/>
               </a:rPr>
-              <a:t>Seis contrastes para pasar de «parece» a «es»</a:t>
+              <a:t>Seis contrastes para </a:t>
+            </a:r>
+            <a:r>
+              <a:rPr lang="en-US" sz="3200" b="1" i="0" dirty="0" err="1">
+                <a:solidFill>
+                  <a:srgbClr val="131B2E"/>
+                </a:solidFill>
+                <a:latin typeface="Space Grotesk" pitchFamily="34" charset="0"/>
+                <a:ea typeface="Space Grotesk" pitchFamily="34" charset="-122"/>
+                <a:cs typeface="Space Grotesk" pitchFamily="34" charset="-120"/>
+              </a:rPr>
+              <a:t>evaluar</a:t>
+            </a:r>
+            <a:r>
+              <a:rPr lang="en-US" sz="3200" b="1" i="0" dirty="0">
+                <a:solidFill>
+                  <a:srgbClr val="131B2E"/>
+                </a:solidFill>
+                <a:latin typeface="Space Grotesk" pitchFamily="34" charset="0"/>
+                <a:ea typeface="Space Grotesk" pitchFamily="34" charset="-122"/>
+                <a:cs typeface="Space Grotesk" pitchFamily="34" charset="-120"/>
+              </a:rPr>
+              <a:t> la </a:t>
+            </a:r>
+            <a:r>
+              <a:rPr lang="en-US" sz="3200" b="1" i="0" dirty="0" err="1">
+                <a:solidFill>
+                  <a:srgbClr val="131B2E"/>
+                </a:solidFill>
+                <a:latin typeface="Space Grotesk" pitchFamily="34" charset="0"/>
+                <a:ea typeface="Space Grotesk" pitchFamily="34" charset="-122"/>
+                <a:cs typeface="Space Grotesk" pitchFamily="34" charset="-120"/>
+              </a:rPr>
+              <a:t>evidencia</a:t>
             </a:r>
             <a:endParaRPr lang="en-US" sz="3200" dirty="0"/>
           </a:p>
@@ -5130,49 +5156,49 @@
           <p:nvPr>
             <p:extLst>
               <p:ext uri="{D42A27DB-BD31-4B8C-83A1-F6EECF244321}">
-                <p14:modId xmlns:p14="http://schemas.microsoft.com/office/powerpoint/2010/main" val="1917494153"/>
+                <p14:modId xmlns:p14="http://schemas.microsoft.com/office/powerpoint/2010/main" val="1344194957"/>
               </p:ext>
             </p:extLst>
           </p:nvPr>
         </p:nvGraphicFramePr>
         <p:xfrm>
-          <a:off x="825500" y="1841438"/>
-          <a:ext cx="10553700" cy="2515128"/>
+          <a:off x="812800" y="1841438"/>
+          <a:ext cx="10642600" cy="2515128"/>
         </p:xfrm>
         <a:graphic>
           <a:graphicData uri="http://schemas.openxmlformats.org/drawingml/2006/table">
             <a:tbl>
               <a:tblPr/>
               <a:tblGrid>
-                <a:gridCol w="633222">
+                <a:gridCol w="638556">
                   <a:extLst>
                     <a:ext uri="{9D8B030D-6E8A-4147-A177-3AD203B41FA5}">
                       <a16:colId xmlns:a16="http://schemas.microsoft.com/office/drawing/2014/main" val="20000"/>
                     </a:ext>
                   </a:extLst>
                 </a:gridCol>
-                <a:gridCol w="3404223">
+                <a:gridCol w="3432899">
                   <a:extLst>
                     <a:ext uri="{9D8B030D-6E8A-4147-A177-3AD203B41FA5}">
                       <a16:colId xmlns:a16="http://schemas.microsoft.com/office/drawing/2014/main" val="20001"/>
                     </a:ext>
                   </a:extLst>
                 </a:gridCol>
-                <a:gridCol w="1978164">
+                <a:gridCol w="1994827">
                   <a:extLst>
                     <a:ext uri="{9D8B030D-6E8A-4147-A177-3AD203B41FA5}">
                       <a16:colId xmlns:a16="http://schemas.microsoft.com/office/drawing/2014/main" val="20002"/>
                     </a:ext>
                   </a:extLst>
                 </a:gridCol>
-                <a:gridCol w="2321814">
+                <a:gridCol w="2341372">
                   <a:extLst>
                     <a:ext uri="{9D8B030D-6E8A-4147-A177-3AD203B41FA5}">
                       <a16:colId xmlns:a16="http://schemas.microsoft.com/office/drawing/2014/main" val="20003"/>
                     </a:ext>
                   </a:extLst>
                 </a:gridCol>
-                <a:gridCol w="2216277">
+                <a:gridCol w="2234946">
                   <a:extLst>
                     <a:ext uri="{9D8B030D-6E8A-4147-A177-3AD203B41FA5}">
                       <a16:colId xmlns:a16="http://schemas.microsoft.com/office/drawing/2014/main" val="20004"/>
@@ -6150,7 +6176,40 @@
                           <a:ea typeface="DM Sans" pitchFamily="34" charset="-122"/>
                           <a:cs typeface="DM Sans" pitchFamily="34" charset="-120"/>
                         </a:rPr>
-                        <a:t>No demostrado</a:t>
+                        <a:t>No hay </a:t>
+                      </a:r>
+                      <a:r>
+                        <a:rPr lang="en-US" sz="1300" dirty="0" err="1">
+                          <a:solidFill>
+                            <a:srgbClr val="B0102A"/>
+                          </a:solidFill>
+                          <a:latin typeface="DM Sans" pitchFamily="34" charset="0"/>
+                          <a:ea typeface="DM Sans" pitchFamily="34" charset="-122"/>
+                          <a:cs typeface="DM Sans" pitchFamily="34" charset="-120"/>
+                        </a:rPr>
+                        <a:t>evidencia</a:t>
+                      </a:r>
+                      <a:r>
+                        <a:rPr lang="en-US" sz="1300" dirty="0">
+                          <a:solidFill>
+                            <a:srgbClr val="B0102A"/>
+                          </a:solidFill>
+                          <a:latin typeface="DM Sans" pitchFamily="34" charset="0"/>
+                          <a:ea typeface="DM Sans" pitchFamily="34" charset="-122"/>
+                          <a:cs typeface="DM Sans" pitchFamily="34" charset="-120"/>
+                        </a:rPr>
+                        <a:t> </a:t>
+                      </a:r>
+                      <a:r>
+                        <a:rPr lang="en-US" sz="1300" dirty="0" err="1">
+                          <a:solidFill>
+                            <a:srgbClr val="B0102A"/>
+                          </a:solidFill>
+                          <a:latin typeface="DM Sans" pitchFamily="34" charset="0"/>
+                          <a:ea typeface="DM Sans" pitchFamily="34" charset="-122"/>
+                          <a:cs typeface="DM Sans" pitchFamily="34" charset="-120"/>
+                        </a:rPr>
+                        <a:t>suficiente</a:t>
                       </a:r>
                       <a:endParaRPr lang="en-US" sz="1300" dirty="0">
                         <a:latin typeface="DM Sans" charset="0"/>
@@ -7598,44 +7657,14 @@
           </a:bodyPr>
           <a:lstStyle/>
           <a:p>
-            <a:pPr marL="0" indent="0" algn="l">
+            <a:pPr>
               <a:lnSpc>
                 <a:spcPts val="1960"/>
               </a:lnSpc>
-              <a:buNone/>
             </a:pPr>
             <a:r>
-              <a:rPr lang="en-US" sz="1400" dirty="0">
-                <a:solidFill>
-                  <a:srgbClr val="4A5266"/>
-                </a:solidFill>
-                <a:latin typeface="DM Sans" pitchFamily="34" charset="0"/>
-                <a:ea typeface="DM Sans" pitchFamily="34" charset="-122"/>
-                <a:cs typeface="DM Sans" pitchFamily="34" charset="-120"/>
-              </a:rPr>
-              <a:t>Lección clave: con 50.000 clientes casi todo sale «significativo». Por eso miramos también </a:t>
-            </a:r>
-            <a:r>
-              <a:rPr lang="en-US" sz="1400" b="1" dirty="0">
-                <a:solidFill>
-                  <a:srgbClr val="131B2E"/>
-                </a:solidFill>
-                <a:latin typeface="DM Sans" pitchFamily="34" charset="0"/>
-                <a:ea typeface="DM Sans" pitchFamily="34" charset="-122"/>
-                <a:cs typeface="DM Sans" pitchFamily="34" charset="-120"/>
-              </a:rPr>
-              <a:t>si la diferencia importa</a:t>
-            </a:r>
-            <a:r>
-              <a:rPr lang="en-US" sz="1400" dirty="0">
-                <a:solidFill>
-                  <a:srgbClr val="4A5266"/>
-                </a:solidFill>
-                <a:latin typeface="DM Sans" pitchFamily="34" charset="0"/>
-                <a:ea typeface="DM Sans" pitchFamily="34" charset="-122"/>
-                <a:cs typeface="DM Sans" pitchFamily="34" charset="-120"/>
-              </a:rPr>
-              <a:t> (H3: 0,34 años no importa).</a:t>
+              <a:rPr lang="es-ES" sz="1400" dirty="0"/>
+              <a:t>Con muestras grandes, incluso diferencias pequeñas pueden resultar estadísticamente significativas. Por eso también evaluamos su relevancia práctica</a:t>
             </a:r>
             <a:endParaRPr lang="en-US" sz="1400" dirty="0"/>
           </a:p>
@@ -7866,7 +7895,7 @@
                 <a:ea typeface="DM Sans" pitchFamily="34" charset="-122"/>
                 <a:cs typeface="DM Sans" pitchFamily="34" charset="-120"/>
               </a:rPr>
-              <a:t>04</a:t>
+              <a:t>05</a:t>
             </a:r>
             <a:endParaRPr lang="en-US" sz="1200" dirty="0"/>
           </a:p>

--- a/outputs/Vanguard_Presentación.pptx
+++ b/outputs/Vanguard_Presentación.pptx
@@ -22,14 +22,21 @@
   <p:notesSz cx="6858000" cy="12192000"/>
   <p:embeddedFontLst>
     <p:embeddedFont>
-      <p:font typeface="DM Sans" pitchFamily="2" charset="0"/>
+      <p:font typeface="Calibri" panose="020F0502020204030204" pitchFamily="34" charset="0"/>
       <p:regular r:id="rId12"/>
       <p:bold r:id="rId13"/>
+      <p:italic r:id="rId14"/>
+      <p:boldItalic r:id="rId15"/>
+    </p:embeddedFont>
+    <p:embeddedFont>
+      <p:font typeface="DM Sans" panose="020B0604020202020204" charset="0"/>
+      <p:regular r:id="rId16"/>
+      <p:bold r:id="rId17"/>
     </p:embeddedFont>
     <p:embeddedFont>
       <p:font typeface="Space Grotesk" panose="020B0604020202020204" charset="0"/>
-      <p:regular r:id="rId14"/>
-      <p:bold r:id="rId15"/>
+      <p:regular r:id="rId18"/>
+      <p:bold r:id="rId19"/>
     </p:embeddedFont>
   </p:embeddedFontLst>
   <p:defaultTextStyle>
@@ -9171,7 +9178,41 @@
                 <a:ea typeface="DM Sans" pitchFamily="34" charset="-122"/>
                 <a:cs typeface="DM Sans" pitchFamily="34" charset="-120"/>
               </a:rPr>
-              <a:t>Grabaciones de sesiones y pruebas de usabilidad en el inicio y el paso 1, donde se concentran las vueltas atrás</a:t>
+              <a:t>Grabaciones de sesiones y pruebas de usabilidad en el inicio y el </a:t>
+            </a:r>
+            <a:r>
+              <a:rPr kumimoji="0" lang="en-US" sz="1300" b="1" i="0" u="none" strike="noStrike" kern="1200" cap="none" spc="0" normalizeH="0" baseline="0" noProof="0" dirty="0">
+                <a:ln>
+                  <a:noFill/>
+                </a:ln>
+                <a:solidFill>
+                  <a:srgbClr val="4A5266"/>
+                </a:solidFill>
+                <a:effectLst/>
+                <a:uLnTx/>
+                <a:uFillTx/>
+                <a:latin typeface="DM Sans" pitchFamily="34" charset="0"/>
+                <a:ea typeface="DM Sans" pitchFamily="34" charset="-122"/>
+                <a:cs typeface="DM Sans" pitchFamily="34" charset="-120"/>
+              </a:rPr>
+              <a:t>paso 1,</a:t>
+            </a:r>
+            <a:r>
+              <a:rPr kumimoji="0" lang="en-US" sz="1300" b="0" i="0" u="none" strike="noStrike" kern="1200" cap="none" spc="0" normalizeH="0" baseline="0" noProof="0" dirty="0">
+                <a:ln>
+                  <a:noFill/>
+                </a:ln>
+                <a:solidFill>
+                  <a:srgbClr val="4A5266"/>
+                </a:solidFill>
+                <a:effectLst/>
+                <a:uLnTx/>
+                <a:uFillTx/>
+                <a:latin typeface="DM Sans" pitchFamily="34" charset="0"/>
+                <a:ea typeface="DM Sans" pitchFamily="34" charset="-122"/>
+                <a:cs typeface="DM Sans" pitchFamily="34" charset="-120"/>
+              </a:rPr>
+              <a:t> donde se concentran las vueltas atrás</a:t>
             </a:r>
             <a:endParaRPr kumimoji="0" lang="en-US" sz="1300" b="0" i="0" u="none" strike="noStrike" kern="1200" cap="none" spc="0" normalizeH="0" baseline="0" noProof="0" dirty="0">
               <a:ln>
@@ -9425,7 +9466,7 @@
         </p:spPr>
         <p:txBody>
           <a:bodyPr wrap="square" lIns="0" tIns="0" rIns="0" bIns="0" rtlCol="0" anchor="t">
-            <a:normAutofit/>
+            <a:normAutofit fontScale="92500"/>
           </a:bodyPr>
           <a:lstStyle/>
           <a:p>
@@ -9461,7 +9502,113 @@
                 <a:ea typeface="DM Sans" pitchFamily="34" charset="-122"/>
                 <a:cs typeface="DM Sans" pitchFamily="34" charset="-120"/>
               </a:rPr>
-              <a:t>Rediseñar las primeras pantallas para que el cliente no tenga que volver atrás</a:t>
+              <a:t>Rediseñar las primeras pantallas para que el cliente no tenga que </a:t>
+            </a:r>
+            <a:r>
+              <a:rPr kumimoji="0" lang="en-US" sz="1300" b="0" i="0" u="none" strike="noStrike" kern="1200" cap="none" spc="0" normalizeH="0" baseline="0" noProof="0" dirty="0" err="1">
+                <a:ln>
+                  <a:noFill/>
+                </a:ln>
+                <a:solidFill>
+                  <a:srgbClr val="4A5266"/>
+                </a:solidFill>
+                <a:effectLst/>
+                <a:uLnTx/>
+                <a:uFillTx/>
+                <a:latin typeface="DM Sans" pitchFamily="34" charset="0"/>
+                <a:ea typeface="DM Sans" pitchFamily="34" charset="-122"/>
+                <a:cs typeface="DM Sans" pitchFamily="34" charset="-120"/>
+              </a:rPr>
+              <a:t>volver</a:t>
+            </a:r>
+            <a:r>
+              <a:rPr kumimoji="0" lang="en-US" sz="1300" b="0" i="0" u="none" strike="noStrike" kern="1200" cap="none" spc="0" normalizeH="0" baseline="0" noProof="0" dirty="0">
+                <a:ln>
+                  <a:noFill/>
+                </a:ln>
+                <a:solidFill>
+                  <a:srgbClr val="4A5266"/>
+                </a:solidFill>
+                <a:effectLst/>
+                <a:uLnTx/>
+                <a:uFillTx/>
+                <a:latin typeface="DM Sans" pitchFamily="34" charset="0"/>
+                <a:ea typeface="DM Sans" pitchFamily="34" charset="-122"/>
+                <a:cs typeface="DM Sans" pitchFamily="34" charset="-120"/>
+              </a:rPr>
+              <a:t> </a:t>
+            </a:r>
+            <a:r>
+              <a:rPr kumimoji="0" lang="en-US" sz="1300" b="0" i="0" u="none" strike="noStrike" kern="1200" cap="none" spc="0" normalizeH="0" baseline="0" noProof="0" dirty="0" err="1">
+                <a:ln>
+                  <a:noFill/>
+                </a:ln>
+                <a:solidFill>
+                  <a:srgbClr val="4A5266"/>
+                </a:solidFill>
+                <a:effectLst/>
+                <a:uLnTx/>
+                <a:uFillTx/>
+                <a:latin typeface="DM Sans" pitchFamily="34" charset="0"/>
+                <a:ea typeface="DM Sans" pitchFamily="34" charset="-122"/>
+                <a:cs typeface="DM Sans" pitchFamily="34" charset="-120"/>
+              </a:rPr>
+              <a:t>atrás</a:t>
+            </a:r>
+            <a:r>
+              <a:rPr lang="en-US" sz="1300" dirty="0">
+                <a:solidFill>
+                  <a:srgbClr val="4A5266"/>
+                </a:solidFill>
+                <a:latin typeface="DM Sans" pitchFamily="34" charset="0"/>
+                <a:ea typeface="DM Sans" pitchFamily="34" charset="-122"/>
+                <a:cs typeface="DM Sans" pitchFamily="34" charset="-120"/>
+              </a:rPr>
+              <a:t> y </a:t>
+            </a:r>
+            <a:r>
+              <a:rPr lang="en-US" sz="1300" dirty="0" err="1">
+                <a:solidFill>
+                  <a:srgbClr val="4A5266"/>
+                </a:solidFill>
+                <a:latin typeface="DM Sans" pitchFamily="34" charset="0"/>
+                <a:ea typeface="DM Sans" pitchFamily="34" charset="-122"/>
+                <a:cs typeface="DM Sans" pitchFamily="34" charset="-120"/>
+              </a:rPr>
+              <a:t>añadir</a:t>
+            </a:r>
+            <a:r>
+              <a:rPr lang="en-US" sz="1300" dirty="0">
+                <a:solidFill>
+                  <a:srgbClr val="4A5266"/>
+                </a:solidFill>
+                <a:latin typeface="DM Sans" pitchFamily="34" charset="0"/>
+                <a:ea typeface="DM Sans" pitchFamily="34" charset="-122"/>
+                <a:cs typeface="DM Sans" pitchFamily="34" charset="-120"/>
+              </a:rPr>
+              <a:t> una Demo </a:t>
+            </a:r>
+            <a:r>
+              <a:rPr lang="en-US" sz="1300" dirty="0" err="1">
+                <a:solidFill>
+                  <a:srgbClr val="4A5266"/>
+                </a:solidFill>
+                <a:latin typeface="DM Sans" pitchFamily="34" charset="0"/>
+                <a:ea typeface="DM Sans" pitchFamily="34" charset="-122"/>
+                <a:cs typeface="DM Sans" pitchFamily="34" charset="-120"/>
+              </a:rPr>
+              <a:t>inicial</a:t>
+            </a:r>
+            <a:r>
+              <a:rPr lang="en-US" sz="1300" dirty="0">
+                <a:solidFill>
+                  <a:srgbClr val="4A5266"/>
+                </a:solidFill>
+                <a:latin typeface="DM Sans" pitchFamily="34" charset="0"/>
+                <a:ea typeface="DM Sans" pitchFamily="34" charset="-122"/>
+                <a:cs typeface="DM Sans" pitchFamily="34" charset="-120"/>
+              </a:rPr>
+              <a:t>.</a:t>
             </a:r>
             <a:endParaRPr kumimoji="0" lang="en-US" sz="1300" b="0" i="0" u="none" strike="noStrike" kern="1200" cap="none" spc="0" normalizeH="0" baseline="0" noProof="0" dirty="0">
               <a:ln>
